--- a/SAGI-pitch.pptx
+++ b/SAGI-pitch.pptx
@@ -119,7 +119,7 @@
     <c:autoTitleDeleted val="1"/>
     <c:plotArea>
       <c:layout/>
-      <c:areaChart>
+      <c:lineChart>
         <c:varyColors val="0"/>
         <c:ser>
           <c:idx val="0"/>
@@ -137,10 +137,15 @@
           </c:tx>
           <c:spPr>
             <a:solidFill>
-              <a:srgbClr val="3C7FA8">
-                <a:alpha val="40000"/>
-              </a:srgbClr>
+              <a:srgbClr val="3C7FA8"/>
             </a:solidFill>
+            <a:ln w="31750" cap="flat">
+              <a:solidFill>
+                <a:srgbClr val="3C7FA8"/>
+              </a:solidFill>
+              <a:prstDash val="solid"/>
+              <a:round/>
+            </a:ln>
             <a:effectLst/>
           </c:spPr>
           <c:invertIfNegative val="0"/>
@@ -168,6 +173,23 @@
             <c:showBubbleSize val="0"/>
             <c:showLeaderLines val="0"/>
           </c:dLbls>
+          <c:marker>
+            <c:symbol val="none"/>
+            <c:size val="6"/>
+            <c:spPr>
+              <a:solidFill>
+                <a:srgbClr val="3C7FA8"/>
+              </a:solidFill>
+              <a:ln w="9525" cap="flat">
+                <a:solidFill>
+                  <a:srgbClr val="3C7FA8"/>
+                </a:solidFill>
+                <a:prstDash val="solid"/>
+                <a:round/>
+              </a:ln>
+              <a:effectLst/>
+            </c:spPr>
+          </c:marker>
           <c:cat>
             <c:multiLvlStrRef>
               <c:f>Sheet1!$A$2:$A$9</c:f>
@@ -235,6 +257,7 @@
               </c:numCache>
             </c:numRef>
           </c:val>
+          <c:smooth val="1"/>
         </c:ser>
         <c:dLbls>
           <c:numFmt formatCode="#,##0" sourceLinked="0"/>
@@ -260,10 +283,11 @@
           <c:showBubbleSize val="0"/>
           <c:showLeaderLines val="0"/>
         </c:dLbls>
+        <c:marker val="1"/>
         <c:axId val="2094734554"/>
         <c:axId val="2094734552"/>
         <c:axId val="2094734556"/>
-      </c:areaChart>
+      </c:lineChart>
       <c:catAx>
         <c:axId val="2094734554"/>
         <c:scaling>
@@ -271,35 +295,6 @@
         </c:scaling>
         <c:delete val="0"/>
         <c:axPos val="b"/>
-        <c:title>
-          <c:tx>
-            <c:rich>
-              <a:bodyPr/>
-              <a:lstStyle/>
-              <a:p>
-                <a:pPr>
-                  <a:defRPr sz="900" b="0" i="0" u="none" strike="noStrike">
-                    <a:solidFill>
-                      <a:srgbClr val="5C6B7A"/>
-                    </a:solidFill>
-                    <a:latin typeface="Gothic A1"/>
-                  </a:defRPr>
-                </a:pPr>
-                <a:r>
-                  <a:rPr sz="900" b="0" i="0" u="none" strike="noStrike">
-                    <a:solidFill>
-                      <a:srgbClr val="5C6B7A"/>
-                    </a:solidFill>
-                    <a:latin typeface="Gothic A1"/>
-                  </a:rPr>
-                  <a:t>Epoch</a:t>
-                </a:r>
-              </a:p>
-            </c:rich>
-          </c:tx>
-          <c:layout/>
-          <c:overlay val="0"/>
-        </c:title>
         <c:numFmt formatCode="General" sourceLinked="1"/>
         <c:majorTickMark val="out"/>
         <c:minorTickMark val="none"/>
@@ -338,6 +333,8 @@
         <c:axId val="2094734552"/>
         <c:scaling>
           <c:orientation val="minMax"/>
+          <c:max val="100"/>
+          <c:min val="0"/>
         </c:scaling>
         <c:delete val="0"/>
         <c:axPos val="l"/>
@@ -345,7 +342,7 @@
           <c:spPr>
             <a:ln w="6350" cap="flat">
               <a:solidFill>
-                <a:srgbClr val="E4D8C8"/>
+                <a:srgbClr val="EAECEE"/>
               </a:solidFill>
               <a:prstDash val="solid"/>
               <a:round/>
@@ -383,6 +380,7 @@
         <c:crossAx val="2094734554"/>
         <c:crosses val="autoZero"/>
         <c:crossBetween val="between"/>
+        <c:majorUnit val="25"/>
       </c:valAx>
       <c:spPr>
         <a:solidFill>
@@ -1541,7 +1539,7 @@
       </p:grpSpPr>
       <p:pic>
         <p:nvPicPr>
-          <p:cNvPr id="2" name="Image 0" descr="assets/logo-dark.png">    </p:cNvPr>
+          <p:cNvPr id="2" name="Image 0" descr="assets/emergence.png">    </p:cNvPr>
           <p:cNvPicPr>
             <a:picLocks noChangeAspect="1"/>
           </p:cNvPicPr>
@@ -1555,24 +1553,48 @@
         </p:blipFill>
         <p:spPr>
           <a:xfrm>
-            <a:off x="685800" y="548640"/>
-            <a:ext cx="1355558" cy="457200"/>
+            <a:off x="0" y="0"/>
+            <a:ext cx="12191695" cy="6858000"/>
           </a:xfrm>
           <a:prstGeom prst="rect">
             <a:avLst/>
           </a:prstGeom>
         </p:spPr>
       </p:pic>
-      <p:sp>
-        <p:nvSpPr>
-          <p:cNvPr id="3" name="Text 0"/>
-          <p:cNvSpPr/>
-          <p:nvPr/>
-        </p:nvSpPr>
-        <p:spPr>
-          <a:xfrm>
-            <a:off x="713232" y="1024128"/>
-            <a:ext cx="7315200" cy="274320"/>
+      <p:pic>
+        <p:nvPicPr>
+          <p:cNvPr id="3" name="Image 1" descr="assets/logo-dark.png">    </p:cNvPr>
+          <p:cNvPicPr>
+            <a:picLocks noChangeAspect="1"/>
+          </p:cNvPicPr>
+          <p:nvPr/>
+        </p:nvPicPr>
+        <p:blipFill>
+          <a:blip r:embed="rId3"/>
+          <a:stretch>
+            <a:fillRect/>
+          </a:stretch>
+        </p:blipFill>
+        <p:spPr>
+          <a:xfrm>
+            <a:off x="822960" y="502920"/>
+            <a:ext cx="1247113" cy="420624"/>
+          </a:xfrm>
+          <a:prstGeom prst="rect">
+            <a:avLst/>
+          </a:prstGeom>
+        </p:spPr>
+      </p:pic>
+      <p:sp>
+        <p:nvSpPr>
+          <p:cNvPr id="4" name="Text 0"/>
+          <p:cNvSpPr/>
+          <p:nvPr/>
+        </p:nvSpPr>
+        <p:spPr>
+          <a:xfrm>
+            <a:off x="822960" y="2377440"/>
+            <a:ext cx="8229600" cy="365760"/>
           </a:xfrm>
           <a:prstGeom prst="rect">
             <a:avLst/>
@@ -1588,7 +1610,7 @@
               <a:buNone/>
             </a:pPr>
             <a:r>
-              <a:rPr lang="en-US" sz="1300" i="1" dirty="0">
+              <a:rPr lang="en-US" sz="2000" dirty="0">
                 <a:solidFill>
                   <a:srgbClr val="3E2A18"/>
                 </a:solidFill>
@@ -1596,58 +1618,103 @@
                 <a:ea typeface="Cormorant" pitchFamily="34" charset="-122"/>
                 <a:cs typeface="Cormorant" pitchFamily="34" charset="-120"/>
               </a:rPr>
-              <a:t>Search for Artificial General Intelligence</a:t>
-            </a:r>
-            <a:endParaRPr lang="en-US" sz="1300" dirty="0"/>
-          </a:p>
-        </p:txBody>
-      </p:sp>
-      <p:sp>
-        <p:nvSpPr>
-          <p:cNvPr id="4" name="Shape 1"/>
-          <p:cNvSpPr/>
-          <p:nvPr/>
-        </p:nvSpPr>
-        <p:spPr>
-          <a:xfrm>
-            <a:off x="713232" y="2432304"/>
-            <a:ext cx="91440" cy="91440"/>
-          </a:xfrm>
-          <a:prstGeom prst="ellipse">
-            <a:avLst/>
-          </a:prstGeom>
-          <a:solidFill>
-            <a:srgbClr val="C04B6E"/>
-          </a:solidFill>
-          <a:ln/>
-        </p:spPr>
-      </p:sp>
-      <p:sp>
-        <p:nvSpPr>
-          <p:cNvPr id="5" name="Text 2"/>
-          <p:cNvSpPr/>
-          <p:nvPr/>
-        </p:nvSpPr>
-        <p:spPr>
-          <a:xfrm>
-            <a:off x="914400" y="2331720"/>
-            <a:ext cx="7315200" cy="365760"/>
-          </a:xfrm>
-          <a:prstGeom prst="rect">
-            <a:avLst/>
-          </a:prstGeom>
-          <a:noFill/>
-          <a:ln/>
-        </p:spPr>
-        <p:txBody>
-          <a:bodyPr wrap="square" lIns="0" tIns="0" rIns="0" bIns="0" rtlCol="0" anchor="ctr"/>
-          <a:lstStyle/>
-          <a:p>
-            <a:pPr algn="l" indent="0" marL="0">
-              <a:buNone/>
-            </a:pPr>
-            <a:r>
-              <a:rPr lang="en-US" sz="1700" spc="100" kern="0" dirty="0">
+              <a:t>a distributed search for general intelligence</a:t>
+            </a:r>
+            <a:endParaRPr lang="en-US" sz="2000" dirty="0"/>
+          </a:p>
+        </p:txBody>
+      </p:sp>
+      <p:sp>
+        <p:nvSpPr>
+          <p:cNvPr id="5" name="Text 1"/>
+          <p:cNvSpPr/>
+          <p:nvPr/>
+        </p:nvSpPr>
+        <p:spPr>
+          <a:xfrm>
+            <a:off x="804672" y="2852928"/>
+            <a:ext cx="9326880" cy="1097280"/>
+          </a:xfrm>
+          <a:prstGeom prst="rect">
+            <a:avLst/>
+          </a:prstGeom>
+          <a:noFill/>
+          <a:ln/>
+        </p:spPr>
+        <p:txBody>
+          <a:bodyPr wrap="square" lIns="0" tIns="0" rIns="0" bIns="0" rtlCol="0" anchor="ctr"/>
+          <a:lstStyle/>
+          <a:p>
+            <a:pPr indent="0" marL="0">
+              <a:lnSpc>
+                <a:spcPts val="4200"/>
+              </a:lnSpc>
+              <a:buNone/>
+            </a:pPr>
+            <a:r>
+              <a:rPr lang="en-US" sz="3400" b="1" dirty="0">
+                <a:solidFill>
+                  <a:srgbClr val="2E2118"/>
+                </a:solidFill>
+                <a:latin typeface="Gothic A1" pitchFamily="34" charset="0"/>
+                <a:ea typeface="Gothic A1" pitchFamily="34" charset="-122"/>
+                <a:cs typeface="Gothic A1" pitchFamily="34" charset="-120"/>
+              </a:rPr>
+              <a:t>We don't know what AGI looks like.</a:t>
+            </a:r>
+            <a:endParaRPr lang="en-US" sz="3400" dirty="0"/>
+          </a:p>
+          <a:p>
+            <a:pPr indent="0" marL="0">
+              <a:lnSpc>
+                <a:spcPts val="4200"/>
+              </a:lnSpc>
+              <a:buNone/>
+            </a:pPr>
+            <a:r>
+              <a:rPr lang="en-US" sz="3400" b="1" dirty="0">
+                <a:solidFill>
+                  <a:srgbClr val="2E2118"/>
+                </a:solidFill>
+                <a:latin typeface="Gothic A1" pitchFamily="34" charset="0"/>
+                <a:ea typeface="Gothic A1" pitchFamily="34" charset="-122"/>
+                <a:cs typeface="Gothic A1" pitchFamily="34" charset="-120"/>
+              </a:rPr>
+              <a:t>So let's search and own it, together.</a:t>
+            </a:r>
+            <a:endParaRPr lang="en-US" sz="3400" dirty="0"/>
+          </a:p>
+        </p:txBody>
+      </p:sp>
+      <p:sp>
+        <p:nvSpPr>
+          <p:cNvPr id="6" name="Text 2"/>
+          <p:cNvSpPr/>
+          <p:nvPr/>
+        </p:nvSpPr>
+        <p:spPr>
+          <a:xfrm>
+            <a:off x="822960" y="4297680"/>
+            <a:ext cx="6126480" cy="1188720"/>
+          </a:xfrm>
+          <a:prstGeom prst="rect">
+            <a:avLst/>
+          </a:prstGeom>
+          <a:noFill/>
+          <a:ln/>
+        </p:spPr>
+        <p:txBody>
+          <a:bodyPr wrap="square" lIns="0" tIns="0" rIns="0" bIns="0" rtlCol="0" anchor="ctr"/>
+          <a:lstStyle/>
+          <a:p>
+            <a:pPr indent="0" marL="0">
+              <a:lnSpc>
+                <a:spcPts val="2200"/>
+              </a:lnSpc>
+              <a:buNone/>
+            </a:pPr>
+            <a:r>
+              <a:rPr lang="en-US" sz="1700" dirty="0">
                 <a:solidFill>
                   <a:srgbClr val="3E2A18"/>
                 </a:solidFill>
@@ -1655,7 +1722,7 @@
                 <a:ea typeface="Cormorant" pitchFamily="34" charset="-122"/>
                 <a:cs typeface="Cormorant" pitchFamily="34" charset="-120"/>
               </a:rPr>
-              <a:t>The vision</a:t>
+              <a:t>A worldwide frontier laboratory where anyone can contribute idle compute. Candidate minds are grown as living organisms, evolved on your hardware, and selected for one thing: the ability to learn.</a:t>
             </a:r>
             <a:endParaRPr lang="en-US" sz="1700" dirty="0"/>
           </a:p>
@@ -1663,33 +1730,52 @@
       </p:sp>
       <p:sp>
         <p:nvSpPr>
-          <p:cNvPr id="6" name="Text 3"/>
-          <p:cNvSpPr/>
-          <p:nvPr/>
-        </p:nvSpPr>
-        <p:spPr>
-          <a:xfrm>
-            <a:off x="658368" y="2697480"/>
-            <a:ext cx="8778240" cy="1828800"/>
-          </a:xfrm>
-          <a:prstGeom prst="rect">
-            <a:avLst/>
-          </a:prstGeom>
-          <a:noFill/>
-          <a:ln/>
-        </p:spPr>
-        <p:txBody>
-          <a:bodyPr wrap="square" lIns="0" tIns="0" rIns="0" bIns="0" rtlCol="0" anchor="ctr"/>
-          <a:lstStyle/>
-          <a:p>
-            <a:pPr algn="l" indent="0" marL="0">
-              <a:lnSpc>
-                <a:spcPts val="6000"/>
-              </a:lnSpc>
-              <a:buNone/>
-            </a:pPr>
-            <a:r>
-              <a:rPr lang="en-US" sz="6000" b="1" dirty="0">
+          <p:cNvPr id="7" name="Shape 3"/>
+          <p:cNvSpPr/>
+          <p:nvPr/>
+        </p:nvSpPr>
+        <p:spPr>
+          <a:xfrm>
+            <a:off x="822960" y="5989320"/>
+            <a:ext cx="1783080" cy="420624"/>
+          </a:xfrm>
+          <a:prstGeom prst="roundRect">
+            <a:avLst>
+              <a:gd name="adj" fmla="val 50000"/>
+            </a:avLst>
+          </a:prstGeom>
+          <a:solidFill>
+            <a:srgbClr val="F5C5CE"/>
+          </a:solidFill>
+          <a:ln/>
+        </p:spPr>
+      </p:sp>
+      <p:sp>
+        <p:nvSpPr>
+          <p:cNvPr id="8" name="Text 4"/>
+          <p:cNvSpPr/>
+          <p:nvPr/>
+        </p:nvSpPr>
+        <p:spPr>
+          <a:xfrm>
+            <a:off x="822960" y="5989320"/>
+            <a:ext cx="1783080" cy="420624"/>
+          </a:xfrm>
+          <a:prstGeom prst="rect">
+            <a:avLst/>
+          </a:prstGeom>
+          <a:noFill/>
+          <a:ln/>
+        </p:spPr>
+        <p:txBody>
+          <a:bodyPr wrap="square" lIns="0" tIns="0" rIns="0" bIns="0" rtlCol="0" anchor="ctr"/>
+          <a:lstStyle/>
+          <a:p>
+            <a:pPr algn="ctr" indent="0" marL="0">
+              <a:buNone/>
+            </a:pPr>
+            <a:r>
+              <a:rPr lang="en-US" sz="1250" b="1" dirty="0">
                 <a:solidFill>
                   <a:srgbClr val="2E2118"/>
                 </a:solidFill>
@@ -1697,19 +1783,62 @@
                 <a:ea typeface="Gothic A1" pitchFamily="34" charset="-122"/>
                 <a:cs typeface="Gothic A1" pitchFamily="34" charset="-120"/>
               </a:rPr>
-              <a:t>Democratize the</a:t>
-            </a:r>
-            <a:endParaRPr lang="en-US" sz="6000" dirty="0"/>
-          </a:p>
-          <a:p>
-            <a:pPr algn="l" indent="0" marL="0">
-              <a:lnSpc>
-                <a:spcPts val="6000"/>
-              </a:lnSpc>
-              <a:buNone/>
-            </a:pPr>
-            <a:r>
-              <a:rPr lang="en-US" sz="6000" b="1" dirty="0">
+              <a:t>Join the network</a:t>
+            </a:r>
+            <a:endParaRPr lang="en-US" sz="1250" dirty="0"/>
+          </a:p>
+        </p:txBody>
+      </p:sp>
+      <p:sp>
+        <p:nvSpPr>
+          <p:cNvPr id="9" name="Shape 5"/>
+          <p:cNvSpPr/>
+          <p:nvPr/>
+        </p:nvSpPr>
+        <p:spPr>
+          <a:xfrm>
+            <a:off x="2788920" y="5989320"/>
+            <a:ext cx="1691640" cy="420624"/>
+          </a:xfrm>
+          <a:prstGeom prst="roundRect">
+            <a:avLst>
+              <a:gd name="adj" fmla="val 50000"/>
+            </a:avLst>
+          </a:prstGeom>
+          <a:ln w="12700">
+            <a:solidFill>
+              <a:srgbClr val="A8886A"/>
+            </a:solidFill>
+            <a:prstDash val="solid"/>
+          </a:ln>
+        </p:spPr>
+      </p:sp>
+      <p:sp>
+        <p:nvSpPr>
+          <p:cNvPr id="10" name="Text 6"/>
+          <p:cNvSpPr/>
+          <p:nvPr/>
+        </p:nvSpPr>
+        <p:spPr>
+          <a:xfrm>
+            <a:off x="2788920" y="5989320"/>
+            <a:ext cx="1691640" cy="420624"/>
+          </a:xfrm>
+          <a:prstGeom prst="rect">
+            <a:avLst/>
+          </a:prstGeom>
+          <a:noFill/>
+          <a:ln/>
+        </p:spPr>
+        <p:txBody>
+          <a:bodyPr wrap="square" lIns="0" tIns="0" rIns="0" bIns="0" rtlCol="0" anchor="ctr"/>
+          <a:lstStyle/>
+          <a:p>
+            <a:pPr algn="ctr" indent="0" marL="0">
+              <a:buNone/>
+            </a:pPr>
+            <a:r>
+              <a:rPr lang="en-US" sz="1250" b="1" dirty="0">
                 <a:solidFill>
                   <a:srgbClr val="2E2118"/>
                 </a:solidFill>
@@ -1717,90 +1846,9 @@
                 <a:ea typeface="Gothic A1" pitchFamily="34" charset="-122"/>
                 <a:cs typeface="Gothic A1" pitchFamily="34" charset="-120"/>
               </a:rPr>
-              <a:t>search for AGI.</a:t>
-            </a:r>
-            <a:endParaRPr lang="en-US" sz="6000" dirty="0"/>
-          </a:p>
-        </p:txBody>
-      </p:sp>
-      <p:sp>
-        <p:nvSpPr>
-          <p:cNvPr id="7" name="Text 4"/>
-          <p:cNvSpPr/>
-          <p:nvPr/>
-        </p:nvSpPr>
-        <p:spPr>
-          <a:xfrm>
-            <a:off x="713232" y="4663440"/>
-            <a:ext cx="6583680" cy="1280160"/>
-          </a:xfrm>
-          <a:prstGeom prst="rect">
-            <a:avLst/>
-          </a:prstGeom>
-          <a:noFill/>
-          <a:ln/>
-        </p:spPr>
-        <p:txBody>
-          <a:bodyPr wrap="square" lIns="0" tIns="0" rIns="0" bIns="0" rtlCol="0" anchor="t"/>
-          <a:lstStyle/>
-          <a:p>
-            <a:pPr algn="l" indent="0" marL="0">
-              <a:lnSpc>
-                <a:spcPts val="2500"/>
-              </a:lnSpc>
-              <a:buNone/>
-            </a:pPr>
-            <a:r>
-              <a:rPr lang="en-US" sz="1900" dirty="0">
-                <a:solidFill>
-                  <a:srgbClr val="3E2A18"/>
-                </a:solidFill>
-                <a:latin typeface="Cormorant" pitchFamily="34" charset="0"/>
-                <a:ea typeface="Cormorant" pitchFamily="34" charset="-122"/>
-                <a:cs typeface="Cormorant" pitchFamily="34" charset="-120"/>
-              </a:rPr>
-              <a:t>The frontier is being built behind closed doors by a handful of labs with concentrated compute. SAGI opens it — a worldwide living laboratory where candidate minds are grown, observed, and selected by many.</a:t>
-            </a:r>
-            <a:endParaRPr lang="en-US" sz="1900" dirty="0"/>
-          </a:p>
-        </p:txBody>
-      </p:sp>
-      <p:sp>
-        <p:nvSpPr>
-          <p:cNvPr id="8" name="Text 5"/>
-          <p:cNvSpPr/>
-          <p:nvPr/>
-        </p:nvSpPr>
-        <p:spPr>
-          <a:xfrm>
-            <a:off x="713232" y="6263640"/>
-            <a:ext cx="8229600" cy="274320"/>
-          </a:xfrm>
-          <a:prstGeom prst="rect">
-            <a:avLst/>
-          </a:prstGeom>
-          <a:noFill/>
-          <a:ln/>
-        </p:spPr>
-        <p:txBody>
-          <a:bodyPr wrap="square" lIns="0" tIns="0" rIns="0" bIns="0" rtlCol="0" anchor="ctr"/>
-          <a:lstStyle/>
-          <a:p>
-            <a:pPr indent="0" marL="0">
-              <a:buNone/>
-            </a:pPr>
-            <a:r>
-              <a:rPr lang="en-US" sz="1100" spc="200" kern="0" dirty="0">
-                <a:solidFill>
-                  <a:srgbClr val="2E2118"/>
-                </a:solidFill>
-                <a:latin typeface="Gothic A1" pitchFamily="34" charset="0"/>
-                <a:ea typeface="Gothic A1" pitchFamily="34" charset="-122"/>
-                <a:cs typeface="Gothic A1" pitchFamily="34" charset="-120"/>
-              </a:rPr>
-              <a:t>A distributed, community-driven research lab</a:t>
-            </a:r>
-            <a:endParaRPr lang="en-US" sz="1100" dirty="0"/>
+              <a:t>Read the thesis</a:t>
+            </a:r>
+            <a:endParaRPr lang="en-US" sz="1250" dirty="0"/>
           </a:p>
         </p:txBody>
       </p:sp>
@@ -1818,7 +1866,7 @@
     <p:bg>
       <p:bgPr>
         <a:solidFill>
-          <a:srgbClr val="F5F0EA"/>
+          <a:srgbClr val="FFFFFF"/>
         </a:solidFill>
       </p:bgPr>
     </p:bg>
@@ -1836,9 +1884,195 @@
           <a:chExt cx="0" cy="0"/>
         </a:xfrm>
       </p:grpSpPr>
+      <p:sp>
+        <p:nvSpPr>
+          <p:cNvPr id="2" name="Shape 0"/>
+          <p:cNvSpPr/>
+          <p:nvPr/>
+        </p:nvSpPr>
+        <p:spPr>
+          <a:xfrm>
+            <a:off x="822960" y="868680"/>
+            <a:ext cx="73152" cy="73152"/>
+          </a:xfrm>
+          <a:prstGeom prst="ellipse">
+            <a:avLst/>
+          </a:prstGeom>
+          <a:solidFill>
+            <a:srgbClr val="C04B6E"/>
+          </a:solidFill>
+          <a:ln/>
+        </p:spPr>
+      </p:sp>
+      <p:sp>
+        <p:nvSpPr>
+          <p:cNvPr id="3" name="Text 1"/>
+          <p:cNvSpPr/>
+          <p:nvPr/>
+        </p:nvSpPr>
+        <p:spPr>
+          <a:xfrm>
+            <a:off x="1005840" y="777240"/>
+            <a:ext cx="8229600" cy="329184"/>
+          </a:xfrm>
+          <a:prstGeom prst="rect">
+            <a:avLst/>
+          </a:prstGeom>
+          <a:noFill/>
+          <a:ln/>
+        </p:spPr>
+        <p:txBody>
+          <a:bodyPr wrap="square" lIns="0" tIns="0" rIns="0" bIns="0" rtlCol="0" anchor="ctr"/>
+          <a:lstStyle/>
+          <a:p>
+            <a:pPr indent="0" marL="0">
+              <a:buNone/>
+            </a:pPr>
+            <a:r>
+              <a:rPr lang="en-US" sz="1800" spc="50" kern="0" dirty="0">
+                <a:solidFill>
+                  <a:srgbClr val="6B4F35"/>
+                </a:solidFill>
+                <a:latin typeface="Cormorant" pitchFamily="34" charset="0"/>
+                <a:ea typeface="Cormorant" pitchFamily="34" charset="-122"/>
+                <a:cs typeface="Cormorant" pitchFamily="34" charset="-120"/>
+              </a:rPr>
+              <a:t>presenting sagi</a:t>
+            </a:r>
+            <a:endParaRPr lang="en-US" sz="1800" dirty="0"/>
+          </a:p>
+        </p:txBody>
+      </p:sp>
+      <p:sp>
+        <p:nvSpPr>
+          <p:cNvPr id="4" name="Text 2"/>
+          <p:cNvSpPr/>
+          <p:nvPr/>
+        </p:nvSpPr>
+        <p:spPr>
+          <a:xfrm>
+            <a:off x="804672" y="1188720"/>
+            <a:ext cx="9144000" cy="1280160"/>
+          </a:xfrm>
+          <a:prstGeom prst="rect">
+            <a:avLst/>
+          </a:prstGeom>
+          <a:noFill/>
+          <a:ln/>
+        </p:spPr>
+        <p:txBody>
+          <a:bodyPr wrap="square" lIns="0" tIns="0" rIns="0" bIns="0" rtlCol="0" anchor="ctr"/>
+          <a:lstStyle/>
+          <a:p>
+            <a:pPr indent="0" marL="0">
+              <a:lnSpc>
+                <a:spcPts val="4400"/>
+              </a:lnSpc>
+              <a:buNone/>
+            </a:pPr>
+            <a:r>
+              <a:rPr lang="en-US" sz="4000" b="1" dirty="0">
+                <a:solidFill>
+                  <a:srgbClr val="2E2118"/>
+                </a:solidFill>
+                <a:latin typeface="Gothic A1" pitchFamily="34" charset="0"/>
+                <a:ea typeface="Gothic A1" pitchFamily="34" charset="-122"/>
+                <a:cs typeface="Gothic A1" pitchFamily="34" charset="-120"/>
+              </a:rPr>
+              <a:t>Search for Artificial</a:t>
+            </a:r>
+            <a:endParaRPr lang="en-US" sz="4000" dirty="0"/>
+          </a:p>
+          <a:p>
+            <a:pPr indent="0" marL="0">
+              <a:lnSpc>
+                <a:spcPts val="4400"/>
+              </a:lnSpc>
+              <a:buNone/>
+            </a:pPr>
+            <a:r>
+              <a:rPr lang="en-US" sz="4000" b="1" dirty="0">
+                <a:solidFill>
+                  <a:srgbClr val="2E2118"/>
+                </a:solidFill>
+                <a:latin typeface="Gothic A1" pitchFamily="34" charset="0"/>
+                <a:ea typeface="Gothic A1" pitchFamily="34" charset="-122"/>
+                <a:cs typeface="Gothic A1" pitchFamily="34" charset="-120"/>
+              </a:rPr>
+              <a:t>General Intelligence</a:t>
+            </a:r>
+            <a:endParaRPr lang="en-US" sz="4000" dirty="0"/>
+          </a:p>
+        </p:txBody>
+      </p:sp>
+      <p:sp>
+        <p:nvSpPr>
+          <p:cNvPr id="5" name="Text 3"/>
+          <p:cNvSpPr/>
+          <p:nvPr/>
+        </p:nvSpPr>
+        <p:spPr>
+          <a:xfrm>
+            <a:off x="822960" y="2697480"/>
+            <a:ext cx="7680960" cy="914400"/>
+          </a:xfrm>
+          <a:prstGeom prst="rect">
+            <a:avLst/>
+          </a:prstGeom>
+          <a:noFill/>
+          <a:ln/>
+        </p:spPr>
+        <p:txBody>
+          <a:bodyPr wrap="square" lIns="0" tIns="0" rIns="0" bIns="0" rtlCol="0" anchor="ctr"/>
+          <a:lstStyle/>
+          <a:p>
+            <a:pPr indent="0" marL="0">
+              <a:lnSpc>
+                <a:spcPts val="2300"/>
+              </a:lnSpc>
+              <a:buNone/>
+            </a:pPr>
+            <a:r>
+              <a:rPr lang="en-US" sz="1800" dirty="0">
+                <a:solidFill>
+                  <a:srgbClr val="6B4F35"/>
+                </a:solidFill>
+                <a:latin typeface="Cormorant" pitchFamily="34" charset="0"/>
+                <a:ea typeface="Cormorant" pitchFamily="34" charset="-122"/>
+                <a:cs typeface="Cormorant" pitchFamily="34" charset="-120"/>
+              </a:rPr>
+              <a:t>A distributed research lab that runs an open, evolutionary search for AGI. Lend your idle compute to an evolving population of candidate algorithms — and help find the next generation of AI models.</a:t>
+            </a:r>
+            <a:endParaRPr lang="en-US" sz="1800" dirty="0"/>
+          </a:p>
+        </p:txBody>
+      </p:sp>
+      <p:sp>
+        <p:nvSpPr>
+          <p:cNvPr id="6" name="Shape 4"/>
+          <p:cNvSpPr/>
+          <p:nvPr/>
+        </p:nvSpPr>
+        <p:spPr>
+          <a:xfrm>
+            <a:off x="822960" y="4069080"/>
+            <a:ext cx="3200400" cy="0"/>
+          </a:xfrm>
+          <a:prstGeom prst="line">
+            <a:avLst/>
+          </a:prstGeom>
+          <a:noFill/>
+          <a:ln w="12700">
+            <a:solidFill>
+              <a:srgbClr val="D6D9DC"/>
+            </a:solidFill>
+            <a:prstDash val="solid"/>
+          </a:ln>
+        </p:spPr>
+      </p:sp>
       <p:pic>
         <p:nvPicPr>
-          <p:cNvPr id="2" name="Image 0" descr="assets/grad-panel.png">    </p:cNvPr>
+          <p:cNvPr id="7" name="Image 0" descr="preencoded.png">    </p:cNvPr>
           <p:cNvPicPr>
             <a:picLocks noChangeAspect="1"/>
           </p:cNvPicPr>
@@ -1846,22 +2080,127 @@
         </p:nvPicPr>
         <p:blipFill>
           <a:blip r:embed="rId1"/>
-          <a:srcRect l="0" r="0" t="0" b="0"/>
-          <a:stretch/>
+          <a:stretch>
+            <a:fillRect/>
+          </a:stretch>
         </p:blipFill>
         <p:spPr>
           <a:xfrm>
-            <a:off x="7818120" y="0"/>
-            <a:ext cx="4373575" cy="6858000"/>
+            <a:off x="822960" y="4325112"/>
+            <a:ext cx="329184" cy="329184"/>
           </a:xfrm>
           <a:prstGeom prst="rect">
             <a:avLst/>
           </a:prstGeom>
         </p:spPr>
       </p:pic>
+      <p:sp>
+        <p:nvSpPr>
+          <p:cNvPr id="8" name="Text 5"/>
+          <p:cNvSpPr/>
+          <p:nvPr/>
+        </p:nvSpPr>
+        <p:spPr>
+          <a:xfrm>
+            <a:off x="822960" y="4846320"/>
+            <a:ext cx="3200400" cy="365760"/>
+          </a:xfrm>
+          <a:prstGeom prst="rect">
+            <a:avLst/>
+          </a:prstGeom>
+          <a:noFill/>
+          <a:ln/>
+        </p:spPr>
+        <p:txBody>
+          <a:bodyPr wrap="square" lIns="0" tIns="0" rIns="0" bIns="0" rtlCol="0" anchor="ctr"/>
+          <a:lstStyle/>
+          <a:p>
+            <a:pPr indent="0" marL="0">
+              <a:buNone/>
+            </a:pPr>
+            <a:r>
+              <a:rPr lang="en-US" sz="1900" b="1" dirty="0">
+                <a:solidFill>
+                  <a:srgbClr val="2E2118"/>
+                </a:solidFill>
+                <a:latin typeface="Gothic A1" pitchFamily="34" charset="0"/>
+                <a:ea typeface="Gothic A1" pitchFamily="34" charset="-122"/>
+                <a:cs typeface="Gothic A1" pitchFamily="34" charset="-120"/>
+              </a:rPr>
+              <a:t>Distributed compute</a:t>
+            </a:r>
+            <a:endParaRPr lang="en-US" sz="1900" dirty="0"/>
+          </a:p>
+        </p:txBody>
+      </p:sp>
+      <p:sp>
+        <p:nvSpPr>
+          <p:cNvPr id="9" name="Text 6"/>
+          <p:cNvSpPr/>
+          <p:nvPr/>
+        </p:nvSpPr>
+        <p:spPr>
+          <a:xfrm>
+            <a:off x="822960" y="5257800"/>
+            <a:ext cx="3200400" cy="1188720"/>
+          </a:xfrm>
+          <a:prstGeom prst="rect">
+            <a:avLst/>
+          </a:prstGeom>
+          <a:noFill/>
+          <a:ln/>
+        </p:spPr>
+        <p:txBody>
+          <a:bodyPr wrap="square" lIns="0" tIns="0" rIns="0" bIns="0" rtlCol="0" anchor="ctr"/>
+          <a:lstStyle/>
+          <a:p>
+            <a:pPr indent="0" marL="0">
+              <a:lnSpc>
+                <a:spcPts val="1900"/>
+              </a:lnSpc>
+              <a:buNone/>
+            </a:pPr>
+            <a:r>
+              <a:rPr lang="en-US" sz="1550" dirty="0">
+                <a:solidFill>
+                  <a:srgbClr val="6B4F35"/>
+                </a:solidFill>
+                <a:latin typeface="Cormorant" pitchFamily="34" charset="0"/>
+                <a:ea typeface="Cormorant" pitchFamily="34" charset="-122"/>
+                <a:cs typeface="Cormorant" pitchFamily="34" charset="-120"/>
+              </a:rPr>
+              <a:t>Thousands of contributors donate idle compute. No datacenter required — the network is the supercomputer.</a:t>
+            </a:r>
+            <a:endParaRPr lang="en-US" sz="1550" dirty="0"/>
+          </a:p>
+        </p:txBody>
+      </p:sp>
+      <p:sp>
+        <p:nvSpPr>
+          <p:cNvPr id="10" name="Shape 7"/>
+          <p:cNvSpPr/>
+          <p:nvPr/>
+        </p:nvSpPr>
+        <p:spPr>
+          <a:xfrm>
+            <a:off x="4480560" y="4069080"/>
+            <a:ext cx="3200400" cy="0"/>
+          </a:xfrm>
+          <a:prstGeom prst="line">
+            <a:avLst/>
+          </a:prstGeom>
+          <a:noFill/>
+          <a:ln w="12700">
+            <a:solidFill>
+              <a:srgbClr val="D6D9DC"/>
+            </a:solidFill>
+            <a:prstDash val="solid"/>
+          </a:ln>
+        </p:spPr>
+      </p:sp>
       <p:pic>
         <p:nvPicPr>
-          <p:cNvPr id="3" name="Image 1" descr="assets/logo-white.png">    </p:cNvPr>
+          <p:cNvPr id="11" name="Image 1" descr="preencoded.png">    </p:cNvPr>
           <p:cNvPicPr>
             <a:picLocks noChangeAspect="1"/>
           </p:cNvPicPr>
@@ -1875,8 +2214,8 @@
         </p:blipFill>
         <p:spPr>
           <a:xfrm>
-            <a:off x="8869680" y="2788920"/>
-            <a:ext cx="1680892" cy="566928"/>
+            <a:off x="4480560" y="4325112"/>
+            <a:ext cx="329184" cy="329184"/>
           </a:xfrm>
           <a:prstGeom prst="rect">
             <a:avLst/>
@@ -1885,229 +2224,111 @@
       </p:pic>
       <p:sp>
         <p:nvSpPr>
-          <p:cNvPr id="4" name="Text 0"/>
-          <p:cNvSpPr/>
-          <p:nvPr/>
-        </p:nvSpPr>
-        <p:spPr>
-          <a:xfrm>
-            <a:off x="7818120" y="3566160"/>
-            <a:ext cx="4373575" cy="365760"/>
-          </a:xfrm>
-          <a:prstGeom prst="rect">
-            <a:avLst/>
-          </a:prstGeom>
-          <a:noFill/>
-          <a:ln/>
-        </p:spPr>
-        <p:txBody>
-          <a:bodyPr wrap="square" lIns="0" tIns="0" rIns="0" bIns="0" rtlCol="0" anchor="ctr"/>
-          <a:lstStyle/>
-          <a:p>
-            <a:pPr algn="ctr" indent="0" marL="0">
-              <a:buNone/>
-            </a:pPr>
-            <a:r>
-              <a:rPr lang="en-US" sz="1600" i="1" dirty="0">
-                <a:solidFill>
-                  <a:srgbClr val="FFFFFF"/>
+          <p:cNvPr id="12" name="Text 8"/>
+          <p:cNvSpPr/>
+          <p:nvPr/>
+        </p:nvSpPr>
+        <p:spPr>
+          <a:xfrm>
+            <a:off x="4480560" y="4846320"/>
+            <a:ext cx="3200400" cy="365760"/>
+          </a:xfrm>
+          <a:prstGeom prst="rect">
+            <a:avLst/>
+          </a:prstGeom>
+          <a:noFill/>
+          <a:ln/>
+        </p:spPr>
+        <p:txBody>
+          <a:bodyPr wrap="square" lIns="0" tIns="0" rIns="0" bIns="0" rtlCol="0" anchor="ctr"/>
+          <a:lstStyle/>
+          <a:p>
+            <a:pPr indent="0" marL="0">
+              <a:buNone/>
+            </a:pPr>
+            <a:r>
+              <a:rPr lang="en-US" sz="1900" b="1" dirty="0">
+                <a:solidFill>
+                  <a:srgbClr val="2E2118"/>
+                </a:solidFill>
+                <a:latin typeface="Gothic A1" pitchFamily="34" charset="0"/>
+                <a:ea typeface="Gothic A1" pitchFamily="34" charset="-122"/>
+                <a:cs typeface="Gothic A1" pitchFamily="34" charset="-120"/>
+              </a:rPr>
+              <a:t>Evolutionary search</a:t>
+            </a:r>
+            <a:endParaRPr lang="en-US" sz="1900" dirty="0"/>
+          </a:p>
+        </p:txBody>
+      </p:sp>
+      <p:sp>
+        <p:nvSpPr>
+          <p:cNvPr id="13" name="Text 9"/>
+          <p:cNvSpPr/>
+          <p:nvPr/>
+        </p:nvSpPr>
+        <p:spPr>
+          <a:xfrm>
+            <a:off x="4480560" y="5257800"/>
+            <a:ext cx="3200400" cy="1188720"/>
+          </a:xfrm>
+          <a:prstGeom prst="rect">
+            <a:avLst/>
+          </a:prstGeom>
+          <a:noFill/>
+          <a:ln/>
+        </p:spPr>
+        <p:txBody>
+          <a:bodyPr wrap="square" lIns="0" tIns="0" rIns="0" bIns="0" rtlCol="0" anchor="ctr"/>
+          <a:lstStyle/>
+          <a:p>
+            <a:pPr indent="0" marL="0">
+              <a:lnSpc>
+                <a:spcPts val="1900"/>
+              </a:lnSpc>
+              <a:buNone/>
+            </a:pPr>
+            <a:r>
+              <a:rPr lang="en-US" sz="1550" dirty="0">
+                <a:solidFill>
+                  <a:srgbClr val="6B4F35"/>
                 </a:solidFill>
                 <a:latin typeface="Cormorant" pitchFamily="34" charset="0"/>
                 <a:ea typeface="Cormorant" pitchFamily="34" charset="-122"/>
                 <a:cs typeface="Cormorant" pitchFamily="34" charset="-120"/>
               </a:rPr>
-              <a:t>a living laboratory</a:t>
-            </a:r>
-            <a:endParaRPr lang="en-US" sz="1600" dirty="0"/>
-          </a:p>
-        </p:txBody>
-      </p:sp>
-      <p:sp>
-        <p:nvSpPr>
-          <p:cNvPr id="5" name="Shape 1"/>
-          <p:cNvSpPr/>
-          <p:nvPr/>
-        </p:nvSpPr>
-        <p:spPr>
-          <a:xfrm>
-            <a:off x="685800" y="877824"/>
-            <a:ext cx="91440" cy="91440"/>
-          </a:xfrm>
-          <a:prstGeom prst="ellipse">
-            <a:avLst/>
-          </a:prstGeom>
-          <a:solidFill>
-            <a:srgbClr val="C04B6E"/>
-          </a:solidFill>
-          <a:ln/>
-        </p:spPr>
-      </p:sp>
-      <p:sp>
-        <p:nvSpPr>
-          <p:cNvPr id="6" name="Text 2"/>
-          <p:cNvSpPr/>
-          <p:nvPr/>
-        </p:nvSpPr>
-        <p:spPr>
-          <a:xfrm>
-            <a:off x="886968" y="777240"/>
-            <a:ext cx="7315200" cy="365760"/>
-          </a:xfrm>
-          <a:prstGeom prst="rect">
-            <a:avLst/>
-          </a:prstGeom>
-          <a:noFill/>
-          <a:ln/>
-        </p:spPr>
-        <p:txBody>
-          <a:bodyPr wrap="square" lIns="0" tIns="0" rIns="0" bIns="0" rtlCol="0" anchor="ctr"/>
-          <a:lstStyle/>
-          <a:p>
-            <a:pPr algn="l" indent="0" marL="0">
-              <a:buNone/>
-            </a:pPr>
-            <a:r>
-              <a:rPr lang="en-US" sz="1700" spc="100" kern="0" dirty="0">
-                <a:solidFill>
-                  <a:srgbClr val="3E2A18"/>
-                </a:solidFill>
-                <a:latin typeface="Cormorant" pitchFamily="34" charset="0"/>
-                <a:ea typeface="Cormorant" pitchFamily="34" charset="-122"/>
-                <a:cs typeface="Cormorant" pitchFamily="34" charset="-120"/>
-              </a:rPr>
-              <a:t>Presenting SAGI</a:t>
-            </a:r>
-            <a:endParaRPr lang="en-US" sz="1700" dirty="0"/>
-          </a:p>
-        </p:txBody>
-      </p:sp>
-      <p:sp>
-        <p:nvSpPr>
-          <p:cNvPr id="7" name="Text 3"/>
-          <p:cNvSpPr/>
-          <p:nvPr/>
-        </p:nvSpPr>
-        <p:spPr>
-          <a:xfrm>
-            <a:off x="640080" y="1143000"/>
-            <a:ext cx="6949440" cy="1463040"/>
-          </a:xfrm>
-          <a:prstGeom prst="rect">
-            <a:avLst/>
-          </a:prstGeom>
-          <a:noFill/>
-          <a:ln/>
-        </p:spPr>
-        <p:txBody>
-          <a:bodyPr wrap="square" lIns="0" tIns="0" rIns="0" bIns="0" rtlCol="0" anchor="ctr"/>
-          <a:lstStyle/>
-          <a:p>
-            <a:pPr indent="0" marL="0">
-              <a:lnSpc>
-                <a:spcPts val="4000"/>
-              </a:lnSpc>
-              <a:buNone/>
-            </a:pPr>
-            <a:r>
-              <a:rPr lang="en-US" sz="3800" b="1" dirty="0">
-                <a:solidFill>
-                  <a:srgbClr val="2E2118"/>
-                </a:solidFill>
-                <a:latin typeface="Gothic A1" pitchFamily="34" charset="0"/>
-                <a:ea typeface="Gothic A1" pitchFamily="34" charset="-122"/>
-                <a:cs typeface="Gothic A1" pitchFamily="34" charset="-120"/>
-              </a:rPr>
-              <a:t>Search for Artificial</a:t>
-            </a:r>
-            <a:endParaRPr lang="en-US" sz="3800" dirty="0"/>
-          </a:p>
-          <a:p>
-            <a:pPr indent="0" marL="0">
-              <a:lnSpc>
-                <a:spcPts val="4000"/>
-              </a:lnSpc>
-              <a:buNone/>
-            </a:pPr>
-            <a:r>
-              <a:rPr lang="en-US" sz="3800" b="1" dirty="0">
-                <a:solidFill>
-                  <a:srgbClr val="2E2118"/>
-                </a:solidFill>
-                <a:latin typeface="Gothic A1" pitchFamily="34" charset="0"/>
-                <a:ea typeface="Gothic A1" pitchFamily="34" charset="-122"/>
-                <a:cs typeface="Gothic A1" pitchFamily="34" charset="-120"/>
-              </a:rPr>
-              <a:t>General Intelligence</a:t>
-            </a:r>
-            <a:endParaRPr lang="en-US" sz="3800" dirty="0"/>
-          </a:p>
-        </p:txBody>
-      </p:sp>
-      <p:sp>
-        <p:nvSpPr>
-          <p:cNvPr id="8" name="Text 4"/>
-          <p:cNvSpPr/>
-          <p:nvPr/>
-        </p:nvSpPr>
-        <p:spPr>
-          <a:xfrm>
-            <a:off x="685800" y="2697480"/>
-            <a:ext cx="6492240" cy="1097280"/>
-          </a:xfrm>
-          <a:prstGeom prst="rect">
-            <a:avLst/>
-          </a:prstGeom>
-          <a:noFill/>
-          <a:ln/>
-        </p:spPr>
-        <p:txBody>
-          <a:bodyPr wrap="square" lIns="0" tIns="0" rIns="0" bIns="0" rtlCol="0" anchor="ctr"/>
-          <a:lstStyle/>
-          <a:p>
-            <a:pPr indent="0" marL="0">
-              <a:lnSpc>
-                <a:spcPts val="2400"/>
-              </a:lnSpc>
-              <a:buNone/>
-            </a:pPr>
-            <a:r>
-              <a:rPr lang="en-US" sz="1800" dirty="0">
-                <a:solidFill>
-                  <a:srgbClr val="3E2A18"/>
-                </a:solidFill>
-                <a:latin typeface="Cormorant" pitchFamily="34" charset="0"/>
-                <a:ea typeface="Cormorant" pitchFamily="34" charset="-122"/>
-                <a:cs typeface="Cormorant" pitchFamily="34" charset="-120"/>
-              </a:rPr>
-              <a:t>A distributed research lab that runs an open, evolutionary search for AGI. Lend your idle compute to an evolving population of candidate algorithms — and help find the next generation of AI models.</a:t>
-            </a:r>
-            <a:endParaRPr lang="en-US" sz="1800" dirty="0"/>
-          </a:p>
-        </p:txBody>
-      </p:sp>
-      <p:sp>
-        <p:nvSpPr>
-          <p:cNvPr id="9" name="Shape 5"/>
-          <p:cNvSpPr/>
-          <p:nvPr/>
-        </p:nvSpPr>
-        <p:spPr>
-          <a:xfrm>
-            <a:off x="685800" y="3977640"/>
-            <a:ext cx="566928" cy="566928"/>
-          </a:xfrm>
-          <a:prstGeom prst="ellipse">
-            <a:avLst/>
-          </a:prstGeom>
-          <a:solidFill>
-            <a:srgbClr val="F5C5CE"/>
-          </a:solidFill>
-          <a:ln/>
+              <a:t>Genomes are grown, verified and selected. Proof of Useful Work — the compute is the research, not wasteful mining.</a:t>
+            </a:r>
+            <a:endParaRPr lang="en-US" sz="1550" dirty="0"/>
+          </a:p>
+        </p:txBody>
+      </p:sp>
+      <p:sp>
+        <p:nvSpPr>
+          <p:cNvPr id="14" name="Shape 10"/>
+          <p:cNvSpPr/>
+          <p:nvPr/>
+        </p:nvSpPr>
+        <p:spPr>
+          <a:xfrm>
+            <a:off x="8138160" y="4069080"/>
+            <a:ext cx="3200400" cy="0"/>
+          </a:xfrm>
+          <a:prstGeom prst="line">
+            <a:avLst/>
+          </a:prstGeom>
+          <a:noFill/>
+          <a:ln w="12700">
+            <a:solidFill>
+              <a:srgbClr val="D6D9DC"/>
+            </a:solidFill>
+            <a:prstDash val="solid"/>
+          </a:ln>
         </p:spPr>
       </p:sp>
       <p:pic>
         <p:nvPicPr>
-          <p:cNvPr id="10" name="Image 2" descr="preencoded.png">    </p:cNvPr>
+          <p:cNvPr id="15" name="Image 2" descr="preencoded.png">    </p:cNvPr>
           <p:cNvPicPr>
             <a:picLocks noChangeAspect="1"/>
           </p:cNvPicPr>
@@ -2121,8 +2342,8 @@
         </p:blipFill>
         <p:spPr>
           <a:xfrm>
-            <a:off x="822960" y="4114800"/>
-            <a:ext cx="292608" cy="292608"/>
+            <a:off x="8138160" y="4325112"/>
+            <a:ext cx="329184" cy="329184"/>
           </a:xfrm>
           <a:prstGeom prst="rect">
             <a:avLst/>
@@ -2131,14 +2352,14 @@
       </p:pic>
       <p:sp>
         <p:nvSpPr>
-          <p:cNvPr id="11" name="Text 6"/>
-          <p:cNvSpPr/>
-          <p:nvPr/>
-        </p:nvSpPr>
-        <p:spPr>
-          <a:xfrm>
-            <a:off x="1463040" y="3941064"/>
-            <a:ext cx="5669280" cy="320040"/>
+          <p:cNvPr id="16" name="Text 11"/>
+          <p:cNvSpPr/>
+          <p:nvPr/>
+        </p:nvSpPr>
+        <p:spPr>
+          <a:xfrm>
+            <a:off x="8138160" y="4846320"/>
+            <a:ext cx="3200400" cy="365760"/>
           </a:xfrm>
           <a:prstGeom prst="rect">
             <a:avLst/>
@@ -2154,7 +2375,7 @@
               <a:buNone/>
             </a:pPr>
             <a:r>
-              <a:rPr lang="en-US" sz="1600" b="1" dirty="0">
+              <a:rPr lang="en-US" sz="1900" b="1" dirty="0">
                 <a:solidFill>
                   <a:srgbClr val="2E2118"/>
                 </a:solidFill>
@@ -2162,22 +2383,22 @@
                 <a:ea typeface="Gothic A1" pitchFamily="34" charset="-122"/>
                 <a:cs typeface="Gothic A1" pitchFamily="34" charset="-120"/>
               </a:rPr>
-              <a:t>Distributed compute</a:t>
-            </a:r>
-            <a:endParaRPr lang="en-US" sz="1600" dirty="0"/>
-          </a:p>
-        </p:txBody>
-      </p:sp>
-      <p:sp>
-        <p:nvSpPr>
-          <p:cNvPr id="12" name="Text 7"/>
-          <p:cNvSpPr/>
-          <p:nvPr/>
-        </p:nvSpPr>
-        <p:spPr>
-          <a:xfrm>
-            <a:off x="1463040" y="4251960"/>
-            <a:ext cx="5760720" cy="502920"/>
+              <a:t>Community-driven</a:t>
+            </a:r>
+            <a:endParaRPr lang="en-US" sz="1900" dirty="0"/>
+          </a:p>
+        </p:txBody>
+      </p:sp>
+      <p:sp>
+        <p:nvSpPr>
+          <p:cNvPr id="17" name="Text 12"/>
+          <p:cNvSpPr/>
+          <p:nvPr/>
+        </p:nvSpPr>
+        <p:spPr>
+          <a:xfrm>
+            <a:off x="8138160" y="5257800"/>
+            <a:ext cx="3200400" cy="1188720"/>
           </a:xfrm>
           <a:prstGeom prst="rect">
             <a:avLst/>
@@ -2191,12 +2412,12 @@
           <a:p>
             <a:pPr indent="0" marL="0">
               <a:lnSpc>
-                <a:spcPts val="1800"/>
+                <a:spcPts val="1900"/>
               </a:lnSpc>
               <a:buNone/>
             </a:pPr>
             <a:r>
-              <a:rPr lang="en-US" sz="1500" dirty="0">
+              <a:rPr lang="en-US" sz="1550" dirty="0">
                 <a:solidFill>
                   <a:srgbClr val="6B4F35"/>
                 </a:solidFill>
@@ -2204,259 +2425,9 @@
                 <a:ea typeface="Cormorant" pitchFamily="34" charset="-122"/>
                 <a:cs typeface="Cormorant" pitchFamily="34" charset="-120"/>
               </a:rPr>
-              <a:t>Thousands of contributors donate idle compute — no datacenter required.</a:t>
-            </a:r>
-            <a:endParaRPr lang="en-US" sz="1500" dirty="0"/>
-          </a:p>
-        </p:txBody>
-      </p:sp>
-      <p:sp>
-        <p:nvSpPr>
-          <p:cNvPr id="13" name="Shape 8"/>
-          <p:cNvSpPr/>
-          <p:nvPr/>
-        </p:nvSpPr>
-        <p:spPr>
-          <a:xfrm>
-            <a:off x="685800" y="4846320"/>
-            <a:ext cx="566928" cy="566928"/>
-          </a:xfrm>
-          <a:prstGeom prst="ellipse">
-            <a:avLst/>
-          </a:prstGeom>
-          <a:solidFill>
-            <a:srgbClr val="F5C5CE"/>
-          </a:solidFill>
-          <a:ln/>
-        </p:spPr>
-      </p:sp>
-      <p:pic>
-        <p:nvPicPr>
-          <p:cNvPr id="14" name="Image 3" descr="preencoded.png">    </p:cNvPr>
-          <p:cNvPicPr>
-            <a:picLocks noChangeAspect="1"/>
-          </p:cNvPicPr>
-          <p:nvPr/>
-        </p:nvPicPr>
-        <p:blipFill>
-          <a:blip r:embed="rId4"/>
-          <a:stretch>
-            <a:fillRect/>
-          </a:stretch>
-        </p:blipFill>
-        <p:spPr>
-          <a:xfrm>
-            <a:off x="822960" y="4983480"/>
-            <a:ext cx="292608" cy="292608"/>
-          </a:xfrm>
-          <a:prstGeom prst="rect">
-            <a:avLst/>
-          </a:prstGeom>
-        </p:spPr>
-      </p:pic>
-      <p:sp>
-        <p:nvSpPr>
-          <p:cNvPr id="15" name="Text 9"/>
-          <p:cNvSpPr/>
-          <p:nvPr/>
-        </p:nvSpPr>
-        <p:spPr>
-          <a:xfrm>
-            <a:off x="1463040" y="4809744"/>
-            <a:ext cx="5669280" cy="320040"/>
-          </a:xfrm>
-          <a:prstGeom prst="rect">
-            <a:avLst/>
-          </a:prstGeom>
-          <a:noFill/>
-          <a:ln/>
-        </p:spPr>
-        <p:txBody>
-          <a:bodyPr wrap="square" lIns="0" tIns="0" rIns="0" bIns="0" rtlCol="0" anchor="ctr"/>
-          <a:lstStyle/>
-          <a:p>
-            <a:pPr indent="0" marL="0">
-              <a:buNone/>
-            </a:pPr>
-            <a:r>
-              <a:rPr lang="en-US" sz="1600" b="1" dirty="0">
-                <a:solidFill>
-                  <a:srgbClr val="2E2118"/>
-                </a:solidFill>
-                <a:latin typeface="Gothic A1" pitchFamily="34" charset="0"/>
-                <a:ea typeface="Gothic A1" pitchFamily="34" charset="-122"/>
-                <a:cs typeface="Gothic A1" pitchFamily="34" charset="-120"/>
-              </a:rPr>
-              <a:t>Evolutionary search</a:t>
-            </a:r>
-            <a:endParaRPr lang="en-US" sz="1600" dirty="0"/>
-          </a:p>
-        </p:txBody>
-      </p:sp>
-      <p:sp>
-        <p:nvSpPr>
-          <p:cNvPr id="16" name="Text 10"/>
-          <p:cNvSpPr/>
-          <p:nvPr/>
-        </p:nvSpPr>
-        <p:spPr>
-          <a:xfrm>
-            <a:off x="1463040" y="5120640"/>
-            <a:ext cx="5760720" cy="502920"/>
-          </a:xfrm>
-          <a:prstGeom prst="rect">
-            <a:avLst/>
-          </a:prstGeom>
-          <a:noFill/>
-          <a:ln/>
-        </p:spPr>
-        <p:txBody>
-          <a:bodyPr wrap="square" lIns="0" tIns="0" rIns="0" bIns="0" rtlCol="0" anchor="ctr"/>
-          <a:lstStyle/>
-          <a:p>
-            <a:pPr indent="0" marL="0">
-              <a:lnSpc>
-                <a:spcPts val="1800"/>
-              </a:lnSpc>
-              <a:buNone/>
-            </a:pPr>
-            <a:r>
-              <a:rPr lang="en-US" sz="1500" dirty="0">
-                <a:solidFill>
-                  <a:srgbClr val="6B4F35"/>
-                </a:solidFill>
-                <a:latin typeface="Cormorant" pitchFamily="34" charset="0"/>
-                <a:ea typeface="Cormorant" pitchFamily="34" charset="-122"/>
-                <a:cs typeface="Cormorant" pitchFamily="34" charset="-120"/>
-              </a:rPr>
-              <a:t>Genomes are grown, verified and selected — Proof of Useful Work, not wasteful mining.</a:t>
-            </a:r>
-            <a:endParaRPr lang="en-US" sz="1500" dirty="0"/>
-          </a:p>
-        </p:txBody>
-      </p:sp>
-      <p:sp>
-        <p:nvSpPr>
-          <p:cNvPr id="17" name="Shape 11"/>
-          <p:cNvSpPr/>
-          <p:nvPr/>
-        </p:nvSpPr>
-        <p:spPr>
-          <a:xfrm>
-            <a:off x="685800" y="5715000"/>
-            <a:ext cx="566928" cy="566928"/>
-          </a:xfrm>
-          <a:prstGeom prst="ellipse">
-            <a:avLst/>
-          </a:prstGeom>
-          <a:solidFill>
-            <a:srgbClr val="F5C5CE"/>
-          </a:solidFill>
-          <a:ln/>
-        </p:spPr>
-      </p:sp>
-      <p:pic>
-        <p:nvPicPr>
-          <p:cNvPr id="18" name="Image 4" descr="preencoded.png">    </p:cNvPr>
-          <p:cNvPicPr>
-            <a:picLocks noChangeAspect="1"/>
-          </p:cNvPicPr>
-          <p:nvPr/>
-        </p:nvPicPr>
-        <p:blipFill>
-          <a:blip r:embed="rId5"/>
-          <a:stretch>
-            <a:fillRect/>
-          </a:stretch>
-        </p:blipFill>
-        <p:spPr>
-          <a:xfrm>
-            <a:off x="822960" y="5852160"/>
-            <a:ext cx="292608" cy="292608"/>
-          </a:xfrm>
-          <a:prstGeom prst="rect">
-            <a:avLst/>
-          </a:prstGeom>
-        </p:spPr>
-      </p:pic>
-      <p:sp>
-        <p:nvSpPr>
-          <p:cNvPr id="19" name="Text 12"/>
-          <p:cNvSpPr/>
-          <p:nvPr/>
-        </p:nvSpPr>
-        <p:spPr>
-          <a:xfrm>
-            <a:off x="1463040" y="5678424"/>
-            <a:ext cx="5669280" cy="320040"/>
-          </a:xfrm>
-          <a:prstGeom prst="rect">
-            <a:avLst/>
-          </a:prstGeom>
-          <a:noFill/>
-          <a:ln/>
-        </p:spPr>
-        <p:txBody>
-          <a:bodyPr wrap="square" lIns="0" tIns="0" rIns="0" bIns="0" rtlCol="0" anchor="ctr"/>
-          <a:lstStyle/>
-          <a:p>
-            <a:pPr indent="0" marL="0">
-              <a:buNone/>
-            </a:pPr>
-            <a:r>
-              <a:rPr lang="en-US" sz="1600" b="1" dirty="0">
-                <a:solidFill>
-                  <a:srgbClr val="2E2118"/>
-                </a:solidFill>
-                <a:latin typeface="Gothic A1" pitchFamily="34" charset="0"/>
-                <a:ea typeface="Gothic A1" pitchFamily="34" charset="-122"/>
-                <a:cs typeface="Gothic A1" pitchFamily="34" charset="-120"/>
-              </a:rPr>
-              <a:t>Community-driven</a:t>
-            </a:r>
-            <a:endParaRPr lang="en-US" sz="1600" dirty="0"/>
-          </a:p>
-        </p:txBody>
-      </p:sp>
-      <p:sp>
-        <p:nvSpPr>
-          <p:cNvPr id="20" name="Text 13"/>
-          <p:cNvSpPr/>
-          <p:nvPr/>
-        </p:nvSpPr>
-        <p:spPr>
-          <a:xfrm>
-            <a:off x="1463040" y="5989320"/>
-            <a:ext cx="5760720" cy="502920"/>
-          </a:xfrm>
-          <a:prstGeom prst="rect">
-            <a:avLst/>
-          </a:prstGeom>
-          <a:noFill/>
-          <a:ln/>
-        </p:spPr>
-        <p:txBody>
-          <a:bodyPr wrap="square" lIns="0" tIns="0" rIns="0" bIns="0" rtlCol="0" anchor="ctr"/>
-          <a:lstStyle/>
-          <a:p>
-            <a:pPr indent="0" marL="0">
-              <a:lnSpc>
-                <a:spcPts val="1800"/>
-              </a:lnSpc>
-              <a:buNone/>
-            </a:pPr>
-            <a:r>
-              <a:rPr lang="en-US" sz="1500" dirty="0">
-                <a:solidFill>
-                  <a:srgbClr val="6B4F35"/>
-                </a:solidFill>
-                <a:latin typeface="Cormorant" pitchFamily="34" charset="0"/>
-                <a:ea typeface="Cormorant" pitchFamily="34" charset="-122"/>
-                <a:cs typeface="Cormorant" pitchFamily="34" charset="-120"/>
-              </a:rPr>
-              <a:t>Open participation and shared upside. The search belongs to everyone.</a:t>
-            </a:r>
-            <a:endParaRPr lang="en-US" sz="1500" dirty="0"/>
+              <a:t>Open participation and shared upside. The search — and what it discovers — belongs to everyone.</a:t>
+            </a:r>
+            <a:endParaRPr lang="en-US" sz="1550" dirty="0"/>
           </a:p>
         </p:txBody>
       </p:sp>
@@ -2500,8 +2471,8 @@
         </p:nvSpPr>
         <p:spPr>
           <a:xfrm>
-            <a:off x="685800" y="740664"/>
-            <a:ext cx="91440" cy="91440"/>
+            <a:off x="822960" y="868680"/>
+            <a:ext cx="73152" cy="73152"/>
           </a:xfrm>
           <a:prstGeom prst="ellipse">
             <a:avLst/>
@@ -2520,34 +2491,34 @@
         </p:nvSpPr>
         <p:spPr>
           <a:xfrm>
-            <a:off x="886968" y="640080"/>
-            <a:ext cx="7315200" cy="365760"/>
-          </a:xfrm>
-          <a:prstGeom prst="rect">
-            <a:avLst/>
-          </a:prstGeom>
-          <a:noFill/>
-          <a:ln/>
-        </p:spPr>
-        <p:txBody>
-          <a:bodyPr wrap="square" lIns="0" tIns="0" rIns="0" bIns="0" rtlCol="0" anchor="ctr"/>
-          <a:lstStyle/>
-          <a:p>
-            <a:pPr algn="l" indent="0" marL="0">
-              <a:buNone/>
-            </a:pPr>
-            <a:r>
-              <a:rPr lang="en-US" sz="1700" spc="100" kern="0" dirty="0">
-                <a:solidFill>
-                  <a:srgbClr val="3E2A18"/>
+            <a:off x="1005840" y="777240"/>
+            <a:ext cx="8229600" cy="329184"/>
+          </a:xfrm>
+          <a:prstGeom prst="rect">
+            <a:avLst/>
+          </a:prstGeom>
+          <a:noFill/>
+          <a:ln/>
+        </p:spPr>
+        <p:txBody>
+          <a:bodyPr wrap="square" lIns="0" tIns="0" rIns="0" bIns="0" rtlCol="0" anchor="ctr"/>
+          <a:lstStyle/>
+          <a:p>
+            <a:pPr indent="0" marL="0">
+              <a:buNone/>
+            </a:pPr>
+            <a:r>
+              <a:rPr lang="en-US" sz="1800" spc="50" kern="0" dirty="0">
+                <a:solidFill>
+                  <a:srgbClr val="6B4F35"/>
                 </a:solidFill>
                 <a:latin typeface="Cormorant" pitchFamily="34" charset="0"/>
                 <a:ea typeface="Cormorant" pitchFamily="34" charset="-122"/>
                 <a:cs typeface="Cormorant" pitchFamily="34" charset="-120"/>
               </a:rPr>
-              <a:t>How it works</a:t>
-            </a:r>
-            <a:endParaRPr lang="en-US" sz="1700" dirty="0"/>
+              <a:t>how it works</a:t>
+            </a:r>
+            <a:endParaRPr lang="en-US" sz="1800" dirty="0"/>
           </a:p>
         </p:txBody>
       </p:sp>
@@ -2559,8 +2530,8 @@
         </p:nvSpPr>
         <p:spPr>
           <a:xfrm>
-            <a:off x="640080" y="1005840"/>
-            <a:ext cx="10972800" cy="731520"/>
+            <a:off x="804672" y="1188720"/>
+            <a:ext cx="10058400" cy="731520"/>
           </a:xfrm>
           <a:prstGeom prst="rect">
             <a:avLst/>
@@ -2576,7 +2547,7 @@
               <a:buNone/>
             </a:pPr>
             <a:r>
-              <a:rPr lang="en-US" sz="3800" b="1" dirty="0">
+              <a:rPr lang="en-US" sz="4000" b="1" dirty="0">
                 <a:solidFill>
                   <a:srgbClr val="2E2118"/>
                 </a:solidFill>
@@ -2586,7 +2557,7 @@
               </a:rPr>
               <a:t>Two sides of the same coin</a:t>
             </a:r>
-            <a:endParaRPr lang="en-US" sz="3800" dirty="0"/>
+            <a:endParaRPr lang="en-US" sz="4000" dirty="0"/>
           </a:p>
         </p:txBody>
       </p:sp>
@@ -2598,16 +2569,23 @@
         </p:nvSpPr>
         <p:spPr>
           <a:xfrm>
-            <a:off x="685800" y="1965960"/>
-            <a:ext cx="5257800" cy="3246120"/>
-          </a:xfrm>
-          <a:prstGeom prst="rect">
-            <a:avLst/>
+            <a:off x="822960" y="2423160"/>
+            <a:ext cx="10545775" cy="2606040"/>
+          </a:xfrm>
+          <a:prstGeom prst="roundRect">
+            <a:avLst>
+              <a:gd name="adj" fmla="val 4211"/>
+            </a:avLst>
           </a:prstGeom>
           <a:solidFill>
-            <a:srgbClr val="F5F0EA"/>
+            <a:srgbClr val="F5F6F7"/>
           </a:solidFill>
-          <a:ln/>
+          <a:ln w="12700">
+            <a:solidFill>
+              <a:srgbClr val="D6D9DC"/>
+            </a:solidFill>
+            <a:prstDash val="solid"/>
+          </a:ln>
         </p:spPr>
       </p:sp>
       <p:sp>
@@ -2618,72 +2596,31 @@
         </p:nvSpPr>
         <p:spPr>
           <a:xfrm>
-            <a:off x="685800" y="1965960"/>
-            <a:ext cx="82296" cy="3246120"/>
-          </a:xfrm>
-          <a:prstGeom prst="rect">
-            <a:avLst/>
-          </a:prstGeom>
-          <a:solidFill>
-            <a:srgbClr val="3C7FA8"/>
-          </a:solidFill>
-          <a:ln/>
-        </p:spPr>
-      </p:sp>
-      <p:sp>
-        <p:nvSpPr>
-          <p:cNvPr id="7" name="Shape 5"/>
-          <p:cNvSpPr/>
-          <p:nvPr/>
-        </p:nvSpPr>
-        <p:spPr>
-          <a:xfrm>
-            <a:off x="1051560" y="2286000"/>
-            <a:ext cx="566928" cy="566928"/>
-          </a:xfrm>
-          <a:prstGeom prst="ellipse">
-            <a:avLst/>
-          </a:prstGeom>
-          <a:solidFill>
-            <a:srgbClr val="3C7FA8"/>
-          </a:solidFill>
-          <a:ln/>
-        </p:spPr>
-      </p:sp>
-      <p:pic>
-        <p:nvPicPr>
-          <p:cNvPr id="8" name="Image 0" descr="preencoded.png">    </p:cNvPr>
-          <p:cNvPicPr>
-            <a:picLocks noChangeAspect="1"/>
-          </p:cNvPicPr>
-          <p:nvPr/>
-        </p:nvPicPr>
-        <p:blipFill>
-          <a:blip r:embed="rId1"/>
-          <a:stretch>
-            <a:fillRect/>
-          </a:stretch>
-        </p:blipFill>
-        <p:spPr>
-          <a:xfrm>
-            <a:off x="1188720" y="2423160"/>
-            <a:ext cx="292608" cy="292608"/>
-          </a:xfrm>
-          <a:prstGeom prst="rect">
-            <a:avLst/>
-          </a:prstGeom>
-        </p:spPr>
-      </p:pic>
-      <p:sp>
-        <p:nvSpPr>
-          <p:cNvPr id="9" name="Text 6"/>
-          <p:cNvSpPr/>
-          <p:nvPr/>
-        </p:nvSpPr>
-        <p:spPr>
-          <a:xfrm>
-            <a:off x="1828800" y="2331720"/>
-            <a:ext cx="3200400" cy="457200"/>
+            <a:off x="6095848" y="2834640"/>
+            <a:ext cx="0" cy="1783080"/>
+          </a:xfrm>
+          <a:prstGeom prst="line">
+            <a:avLst/>
+          </a:prstGeom>
+          <a:noFill/>
+          <a:ln w="12700">
+            <a:solidFill>
+              <a:srgbClr val="D6D9DC"/>
+            </a:solidFill>
+            <a:prstDash val="solid"/>
+          </a:ln>
+        </p:spPr>
+      </p:sp>
+      <p:sp>
+        <p:nvSpPr>
+          <p:cNvPr id="7" name="Text 5"/>
+          <p:cNvSpPr/>
+          <p:nvPr/>
+        </p:nvSpPr>
+        <p:spPr>
+          <a:xfrm>
+            <a:off x="1325880" y="2807208"/>
+            <a:ext cx="4206240" cy="274320"/>
           </a:xfrm>
           <a:prstGeom prst="rect">
             <a:avLst/>
@@ -2699,7 +2636,46 @@
               <a:buNone/>
             </a:pPr>
             <a:r>
-              <a:rPr lang="en-US" sz="2200" b="1" dirty="0">
+              <a:rPr lang="en-US" sz="1200" spc="200" kern="0" dirty="0">
+                <a:solidFill>
+                  <a:srgbClr val="3C7FA8"/>
+                </a:solidFill>
+                <a:latin typeface="Courier New" pitchFamily="34" charset="0"/>
+                <a:ea typeface="Courier New" pitchFamily="34" charset="-122"/>
+                <a:cs typeface="Courier New" pitchFamily="34" charset="-120"/>
+              </a:rPr>
+              <a:t>THE ENGINE</a:t>
+            </a:r>
+            <a:endParaRPr lang="en-US" sz="1200" dirty="0"/>
+          </a:p>
+        </p:txBody>
+      </p:sp>
+      <p:sp>
+        <p:nvSpPr>
+          <p:cNvPr id="8" name="Text 6"/>
+          <p:cNvSpPr/>
+          <p:nvPr/>
+        </p:nvSpPr>
+        <p:spPr>
+          <a:xfrm>
+            <a:off x="1325880" y="3172968"/>
+            <a:ext cx="4297680" cy="365760"/>
+          </a:xfrm>
+          <a:prstGeom prst="rect">
+            <a:avLst/>
+          </a:prstGeom>
+          <a:noFill/>
+          <a:ln/>
+        </p:spPr>
+        <p:txBody>
+          <a:bodyPr wrap="square" lIns="0" tIns="0" rIns="0" bIns="0" rtlCol="0" anchor="ctr"/>
+          <a:lstStyle/>
+          <a:p>
+            <a:pPr indent="0" marL="0">
+              <a:buNone/>
+            </a:pPr>
+            <a:r>
+              <a:rPr lang="en-US" sz="1900" b="1" dirty="0">
                 <a:solidFill>
                   <a:srgbClr val="2E2118"/>
                 </a:solidFill>
@@ -2707,22 +2683,22 @@
                 <a:ea typeface="Gothic A1" pitchFamily="34" charset="-122"/>
                 <a:cs typeface="Gothic A1" pitchFamily="34" charset="-120"/>
               </a:rPr>
-              <a:t>The engine</a:t>
-            </a:r>
-            <a:endParaRPr lang="en-US" sz="2200" dirty="0"/>
-          </a:p>
-        </p:txBody>
-      </p:sp>
-      <p:sp>
-        <p:nvSpPr>
-          <p:cNvPr id="10" name="Text 7"/>
-          <p:cNvSpPr/>
-          <p:nvPr/>
-        </p:nvSpPr>
-        <p:spPr>
-          <a:xfrm>
-            <a:off x="1051560" y="2990088"/>
-            <a:ext cx="4617720" cy="365760"/>
+              <a:t>Evolutionary search</a:t>
+            </a:r>
+            <a:endParaRPr lang="en-US" sz="1900" dirty="0"/>
+          </a:p>
+        </p:txBody>
+      </p:sp>
+      <p:sp>
+        <p:nvSpPr>
+          <p:cNvPr id="9" name="Text 7"/>
+          <p:cNvSpPr/>
+          <p:nvPr/>
+        </p:nvSpPr>
+        <p:spPr>
+          <a:xfrm>
+            <a:off x="1325880" y="3657600"/>
+            <a:ext cx="4251960" cy="1188720"/>
           </a:xfrm>
           <a:prstGeom prst="rect">
             <a:avLst/>
@@ -2735,435 +2711,231 @@
           <a:lstStyle/>
           <a:p>
             <a:pPr indent="0" marL="0">
-              <a:buNone/>
-            </a:pPr>
-            <a:r>
-              <a:rPr lang="en-US" sz="1700" i="1" dirty="0">
-                <a:solidFill>
-                  <a:srgbClr val="2A5F7D"/>
+              <a:lnSpc>
+                <a:spcPts val="1900"/>
+              </a:lnSpc>
+              <a:buNone/>
+            </a:pPr>
+            <a:r>
+              <a:rPr lang="en-US" sz="1550" dirty="0">
+                <a:solidFill>
+                  <a:srgbClr val="6B4F35"/>
                 </a:solidFill>
                 <a:latin typeface="Cormorant" pitchFamily="34" charset="0"/>
                 <a:ea typeface="Cormorant" pitchFamily="34" charset="-122"/>
                 <a:cs typeface="Cormorant" pitchFamily="34" charset="-120"/>
               </a:rPr>
-              <a:t>Deep-tech distributed evolutionary search</a:t>
-            </a:r>
-            <a:endParaRPr lang="en-US" sz="1700" dirty="0"/>
-          </a:p>
-        </p:txBody>
-      </p:sp>
-      <p:sp>
-        <p:nvSpPr>
-          <p:cNvPr id="11" name="Text 8"/>
-          <p:cNvSpPr/>
-          <p:nvPr/>
-        </p:nvSpPr>
-        <p:spPr>
-          <a:xfrm>
-            <a:off x="1051560" y="3566160"/>
-            <a:ext cx="4663440" cy="1463040"/>
-          </a:xfrm>
-          <a:prstGeom prst="rect">
-            <a:avLst/>
-          </a:prstGeom>
-          <a:noFill/>
-          <a:ln/>
-        </p:spPr>
-        <p:txBody>
-          <a:bodyPr wrap="square" lIns="0" tIns="0" rIns="0" bIns="0" rtlCol="0" anchor="ctr"/>
-          <a:lstStyle/>
-          <a:p>
-            <a:pPr marL="342900" indent="-342900">
+              <a:t>Candidate algorithms are grown, verified and selected across the network. The compute that secures SAGI is the research itself — Proof of Useful Work, not wasteful mining.</a:t>
+            </a:r>
+            <a:endParaRPr lang="en-US" sz="1550" dirty="0"/>
+          </a:p>
+        </p:txBody>
+      </p:sp>
+      <p:sp>
+        <p:nvSpPr>
+          <p:cNvPr id="10" name="Text 8"/>
+          <p:cNvSpPr/>
+          <p:nvPr/>
+        </p:nvSpPr>
+        <p:spPr>
+          <a:xfrm>
+            <a:off x="6598768" y="2807208"/>
+            <a:ext cx="4206240" cy="274320"/>
+          </a:xfrm>
+          <a:prstGeom prst="rect">
+            <a:avLst/>
+          </a:prstGeom>
+          <a:noFill/>
+          <a:ln/>
+        </p:spPr>
+        <p:txBody>
+          <a:bodyPr wrap="square" lIns="0" tIns="0" rIns="0" bIns="0" rtlCol="0" anchor="ctr"/>
+          <a:lstStyle/>
+          <a:p>
+            <a:pPr indent="0" marL="0">
+              <a:buNone/>
+            </a:pPr>
+            <a:r>
+              <a:rPr lang="en-US" sz="1200" spc="200" kern="0" dirty="0">
+                <a:solidFill>
+                  <a:srgbClr val="C04B6E"/>
+                </a:solidFill>
+                <a:latin typeface="Courier New" pitchFamily="34" charset="0"/>
+                <a:ea typeface="Courier New" pitchFamily="34" charset="-122"/>
+                <a:cs typeface="Courier New" pitchFamily="34" charset="-120"/>
+              </a:rPr>
+              <a:t>THE SDK</a:t>
+            </a:r>
+            <a:endParaRPr lang="en-US" sz="1200" dirty="0"/>
+          </a:p>
+        </p:txBody>
+      </p:sp>
+      <p:sp>
+        <p:nvSpPr>
+          <p:cNvPr id="11" name="Text 9"/>
+          <p:cNvSpPr/>
+          <p:nvPr/>
+        </p:nvSpPr>
+        <p:spPr>
+          <a:xfrm>
+            <a:off x="6598768" y="3172968"/>
+            <a:ext cx="4297680" cy="365760"/>
+          </a:xfrm>
+          <a:prstGeom prst="rect">
+            <a:avLst/>
+          </a:prstGeom>
+          <a:noFill/>
+          <a:ln/>
+        </p:spPr>
+        <p:txBody>
+          <a:bodyPr wrap="square" lIns="0" tIns="0" rIns="0" bIns="0" rtlCol="0" anchor="ctr"/>
+          <a:lstStyle/>
+          <a:p>
+            <a:pPr indent="0" marL="0">
+              <a:buNone/>
+            </a:pPr>
+            <a:r>
+              <a:rPr lang="en-US" sz="1900" b="1" dirty="0">
+                <a:solidFill>
+                  <a:srgbClr val="2E2118"/>
+                </a:solidFill>
+                <a:latin typeface="Gothic A1" pitchFamily="34" charset="0"/>
+                <a:ea typeface="Gothic A1" pitchFamily="34" charset="-122"/>
+                <a:cs typeface="Gothic A1" pitchFamily="34" charset="-120"/>
+              </a:rPr>
+              <a:t>A kit to achieve scale</a:t>
+            </a:r>
+            <a:endParaRPr lang="en-US" sz="1900" dirty="0"/>
+          </a:p>
+        </p:txBody>
+      </p:sp>
+      <p:sp>
+        <p:nvSpPr>
+          <p:cNvPr id="12" name="Text 10"/>
+          <p:cNvSpPr/>
+          <p:nvPr/>
+        </p:nvSpPr>
+        <p:spPr>
+          <a:xfrm>
+            <a:off x="6598768" y="3657600"/>
+            <a:ext cx="4251960" cy="1188720"/>
+          </a:xfrm>
+          <a:prstGeom prst="rect">
+            <a:avLst/>
+          </a:prstGeom>
+          <a:noFill/>
+          <a:ln/>
+        </p:spPr>
+        <p:txBody>
+          <a:bodyPr wrap="square" lIns="0" tIns="0" rIns="0" bIns="0" rtlCol="0" anchor="ctr"/>
+          <a:lstStyle/>
+          <a:p>
+            <a:pPr indent="0" marL="0">
               <a:lnSpc>
-                <a:spcPts val="1700"/>
+                <a:spcPts val="1900"/>
               </a:lnSpc>
-              <a:spcAft>
-                <a:spcPts val="700"/>
-              </a:spcAft>
-              <a:buSzPct val="100000"/>
-              <a:buChar char="•"/>
-            </a:pPr>
-            <a:r>
-              <a:rPr lang="en-US" sz="1500" dirty="0">
-                <a:solidFill>
-                  <a:srgbClr val="3E2A18"/>
+              <a:buNone/>
+            </a:pPr>
+            <a:r>
+              <a:rPr lang="en-US" sz="1550" dirty="0">
+                <a:solidFill>
+                  <a:srgbClr val="6B4F35"/>
                 </a:solidFill>
                 <a:latin typeface="Cormorant" pitchFamily="34" charset="0"/>
                 <a:ea typeface="Cormorant" pitchFamily="34" charset="-122"/>
                 <a:cs typeface="Cormorant" pitchFamily="34" charset="-120"/>
               </a:rPr>
-              <a:t>Candidate algorithms evolved, verified and selected across the network.</a:t>
-            </a:r>
-            <a:endParaRPr lang="en-US" sz="1500" dirty="0"/>
-          </a:p>
-          <a:p>
-            <a:pPr marL="342900" indent="-342900">
-              <a:lnSpc>
-                <a:spcPts val="1700"/>
-              </a:lnSpc>
-              <a:spcAft>
-                <a:spcPts val="700"/>
-              </a:spcAft>
-              <a:buSzPct val="100000"/>
-              <a:buChar char="•"/>
-            </a:pPr>
-            <a:r>
-              <a:rPr lang="en-US" sz="1500" dirty="0">
-                <a:solidFill>
-                  <a:srgbClr val="3E2A18"/>
-                </a:solidFill>
-                <a:latin typeface="Cormorant" pitchFamily="34" charset="0"/>
-                <a:ea typeface="Cormorant" pitchFamily="34" charset="-122"/>
-                <a:cs typeface="Cormorant" pitchFamily="34" charset="-120"/>
-              </a:rPr>
-              <a:t>Reproducible results, independently verified before any reward.</a:t>
-            </a:r>
-            <a:endParaRPr lang="en-US" sz="1500" dirty="0"/>
-          </a:p>
-          <a:p>
-            <a:pPr marL="342900" indent="-342900">
-              <a:lnSpc>
-                <a:spcPts val="1700"/>
-              </a:lnSpc>
-              <a:buSzPct val="100000"/>
-              <a:buChar char="•"/>
-            </a:pPr>
-            <a:r>
-              <a:rPr lang="en-US" sz="1500" dirty="0">
-                <a:solidFill>
-                  <a:srgbClr val="3E2A18"/>
-                </a:solidFill>
-                <a:latin typeface="Cormorant" pitchFamily="34" charset="0"/>
-                <a:ea typeface="Cormorant" pitchFamily="34" charset="-122"/>
-                <a:cs typeface="Cormorant" pitchFamily="34" charset="-120"/>
-              </a:rPr>
-              <a:t>The compute that secures the network is the research itself.</a:t>
-            </a:r>
-            <a:endParaRPr lang="en-US" sz="1500" dirty="0"/>
-          </a:p>
-        </p:txBody>
-      </p:sp>
-      <p:sp>
-        <p:nvSpPr>
-          <p:cNvPr id="12" name="Shape 9"/>
-          <p:cNvSpPr/>
-          <p:nvPr/>
-        </p:nvSpPr>
-        <p:spPr>
-          <a:xfrm>
-            <a:off x="6245352" y="1965960"/>
-            <a:ext cx="5257800" cy="3246120"/>
-          </a:xfrm>
-          <a:prstGeom prst="rect">
-            <a:avLst/>
-          </a:prstGeom>
-          <a:solidFill>
-            <a:srgbClr val="F5F0EA"/>
-          </a:solidFill>
-          <a:ln/>
-        </p:spPr>
-      </p:sp>
-      <p:sp>
-        <p:nvSpPr>
-          <p:cNvPr id="13" name="Shape 10"/>
-          <p:cNvSpPr/>
-          <p:nvPr/>
-        </p:nvSpPr>
-        <p:spPr>
-          <a:xfrm>
-            <a:off x="6245352" y="1965960"/>
-            <a:ext cx="82296" cy="3246120"/>
-          </a:xfrm>
-          <a:prstGeom prst="rect">
-            <a:avLst/>
-          </a:prstGeom>
-          <a:solidFill>
-            <a:srgbClr val="C04B6E"/>
-          </a:solidFill>
-          <a:ln/>
-        </p:spPr>
-      </p:sp>
-      <p:sp>
-        <p:nvSpPr>
-          <p:cNvPr id="14" name="Shape 11"/>
-          <p:cNvSpPr/>
-          <p:nvPr/>
-        </p:nvSpPr>
-        <p:spPr>
-          <a:xfrm>
-            <a:off x="6611112" y="2286000"/>
-            <a:ext cx="566928" cy="566928"/>
-          </a:xfrm>
-          <a:prstGeom prst="ellipse">
-            <a:avLst/>
-          </a:prstGeom>
-          <a:solidFill>
-            <a:srgbClr val="C04B6E"/>
-          </a:solidFill>
-          <a:ln/>
-        </p:spPr>
-      </p:sp>
-      <p:pic>
-        <p:nvPicPr>
-          <p:cNvPr id="15" name="Image 1" descr="preencoded.png">    </p:cNvPr>
-          <p:cNvPicPr>
-            <a:picLocks noChangeAspect="1"/>
-          </p:cNvPicPr>
-          <p:nvPr/>
-        </p:nvPicPr>
-        <p:blipFill>
-          <a:blip r:embed="rId2"/>
-          <a:stretch>
-            <a:fillRect/>
-          </a:stretch>
-        </p:blipFill>
-        <p:spPr>
-          <a:xfrm>
-            <a:off x="6748272" y="2423160"/>
-            <a:ext cx="292608" cy="292608"/>
-          </a:xfrm>
-          <a:prstGeom prst="rect">
-            <a:avLst/>
-          </a:prstGeom>
-        </p:spPr>
-      </p:pic>
-      <p:sp>
-        <p:nvSpPr>
-          <p:cNvPr id="16" name="Text 12"/>
-          <p:cNvSpPr/>
-          <p:nvPr/>
-        </p:nvSpPr>
-        <p:spPr>
-          <a:xfrm>
-            <a:off x="7388352" y="2331720"/>
-            <a:ext cx="3200400" cy="457200"/>
-          </a:xfrm>
-          <a:prstGeom prst="rect">
-            <a:avLst/>
-          </a:prstGeom>
-          <a:noFill/>
-          <a:ln/>
-        </p:spPr>
-        <p:txBody>
-          <a:bodyPr wrap="square" lIns="0" tIns="0" rIns="0" bIns="0" rtlCol="0" anchor="ctr"/>
-          <a:lstStyle/>
-          <a:p>
-            <a:pPr indent="0" marL="0">
+              <a:t>Games and apps plug in idle compute; developers add new use-cases and environments. A restricted runtime never executes arbitrary code — every integration adds compute, and earns tokens.</a:t>
+            </a:r>
+            <a:endParaRPr lang="en-US" sz="1550" dirty="0"/>
+          </a:p>
+        </p:txBody>
+      </p:sp>
+      <p:sp>
+        <p:nvSpPr>
+          <p:cNvPr id="13" name="Shape 11"/>
+          <p:cNvSpPr/>
+          <p:nvPr/>
+        </p:nvSpPr>
+        <p:spPr>
+          <a:xfrm>
+            <a:off x="822960" y="5715000"/>
+            <a:ext cx="10545775" cy="0"/>
+          </a:xfrm>
+          <a:prstGeom prst="line">
+            <a:avLst/>
+          </a:prstGeom>
+          <a:noFill/>
+          <a:ln w="12700">
+            <a:solidFill>
+              <a:srgbClr val="D6D9DC"/>
+            </a:solidFill>
+            <a:prstDash val="solid"/>
+          </a:ln>
+        </p:spPr>
+      </p:sp>
+      <p:sp>
+        <p:nvSpPr>
+          <p:cNvPr id="14" name="Text 12"/>
+          <p:cNvSpPr/>
+          <p:nvPr/>
+        </p:nvSpPr>
+        <p:spPr>
+          <a:xfrm>
+            <a:off x="822960" y="5897880"/>
+            <a:ext cx="10545775" cy="548640"/>
+          </a:xfrm>
+          <a:prstGeom prst="rect">
+            <a:avLst/>
+          </a:prstGeom>
+          <a:noFill/>
+          <a:ln/>
+        </p:spPr>
+        <p:txBody>
+          <a:bodyPr wrap="square" lIns="0" tIns="0" rIns="0" bIns="0" rtlCol="0" anchor="ctr"/>
+          <a:lstStyle/>
+          <a:p>
+            <a:pPr algn="ctr" indent="0" marL="0">
               <a:buNone/>
             </a:pPr>
             <a:r>
               <a:rPr lang="en-US" sz="2200" b="1" dirty="0">
                 <a:solidFill>
-                  <a:srgbClr val="2E2118"/>
+                  <a:srgbClr val="C04B6E"/>
                 </a:solidFill>
                 <a:latin typeface="Gothic A1" pitchFamily="34" charset="0"/>
                 <a:ea typeface="Gothic A1" pitchFamily="34" charset="-122"/>
                 <a:cs typeface="Gothic A1" pitchFamily="34" charset="-120"/>
               </a:rPr>
-              <a:t>The SDK</a:t>
-            </a:r>
-            <a:endParaRPr lang="en-US" sz="2200" dirty="0"/>
-          </a:p>
-        </p:txBody>
-      </p:sp>
-      <p:sp>
-        <p:nvSpPr>
-          <p:cNvPr id="17" name="Text 13"/>
-          <p:cNvSpPr/>
-          <p:nvPr/>
-        </p:nvSpPr>
-        <p:spPr>
-          <a:xfrm>
-            <a:off x="6611112" y="2990088"/>
-            <a:ext cx="4617720" cy="365760"/>
-          </a:xfrm>
-          <a:prstGeom prst="rect">
-            <a:avLst/>
-          </a:prstGeom>
-          <a:noFill/>
-          <a:ln/>
-        </p:spPr>
-        <p:txBody>
-          <a:bodyPr wrap="square" lIns="0" tIns="0" rIns="0" bIns="0" rtlCol="0" anchor="ctr"/>
-          <a:lstStyle/>
-          <a:p>
-            <a:pPr indent="0" marL="0">
-              <a:buNone/>
-            </a:pPr>
-            <a:r>
-              <a:rPr lang="en-US" sz="1700" i="1" dirty="0">
-                <a:solidFill>
-                  <a:srgbClr val="7A1F3D"/>
-                </a:solidFill>
-                <a:latin typeface="Cormorant" pitchFamily="34" charset="0"/>
-                <a:ea typeface="Cormorant" pitchFamily="34" charset="-122"/>
-                <a:cs typeface="Cormorant" pitchFamily="34" charset="-120"/>
-              </a:rPr>
-              <a:t>A developer kit to achieve scale</a:t>
-            </a:r>
-            <a:endParaRPr lang="en-US" sz="1700" dirty="0"/>
-          </a:p>
-        </p:txBody>
-      </p:sp>
-      <p:sp>
-        <p:nvSpPr>
-          <p:cNvPr id="18" name="Text 14"/>
-          <p:cNvSpPr/>
-          <p:nvPr/>
-        </p:nvSpPr>
-        <p:spPr>
-          <a:xfrm>
-            <a:off x="6611112" y="3566160"/>
-            <a:ext cx="4663440" cy="1463040"/>
-          </a:xfrm>
-          <a:prstGeom prst="rect">
-            <a:avLst/>
-          </a:prstGeom>
-          <a:noFill/>
-          <a:ln/>
-        </p:spPr>
-        <p:txBody>
-          <a:bodyPr wrap="square" lIns="0" tIns="0" rIns="0" bIns="0" rtlCol="0" anchor="ctr"/>
-          <a:lstStyle/>
-          <a:p>
-            <a:pPr marL="342900" indent="-342900">
-              <a:lnSpc>
-                <a:spcPts val="1700"/>
-              </a:lnSpc>
-              <a:spcAft>
-                <a:spcPts val="700"/>
-              </a:spcAft>
-              <a:buSzPct val="100000"/>
-              <a:buChar char="•"/>
-            </a:pPr>
-            <a:r>
-              <a:rPr lang="en-US" sz="1500" dirty="0">
-                <a:solidFill>
-                  <a:srgbClr val="3E2A18"/>
-                </a:solidFill>
-                <a:latin typeface="Cormorant" pitchFamily="34" charset="0"/>
-                <a:ea typeface="Cormorant" pitchFamily="34" charset="-122"/>
-                <a:cs typeface="Cormorant" pitchFamily="34" charset="-120"/>
-              </a:rPr>
-              <a:t>Games and apps plug in idle compute; developers add new use-cases.</a:t>
-            </a:r>
-            <a:endParaRPr lang="en-US" sz="1500" dirty="0"/>
-          </a:p>
-          <a:p>
-            <a:pPr marL="342900" indent="-342900">
-              <a:lnSpc>
-                <a:spcPts val="1700"/>
-              </a:lnSpc>
-              <a:spcAft>
-                <a:spcPts val="700"/>
-              </a:spcAft>
-              <a:buSzPct val="100000"/>
-              <a:buChar char="•"/>
-            </a:pPr>
-            <a:r>
-              <a:rPr lang="en-US" sz="1500" dirty="0">
-                <a:solidFill>
-                  <a:srgbClr val="3E2A18"/>
-                </a:solidFill>
-                <a:latin typeface="Cormorant" pitchFamily="34" charset="0"/>
-                <a:ea typeface="Cormorant" pitchFamily="34" charset="-122"/>
-                <a:cs typeface="Cormorant" pitchFamily="34" charset="-120"/>
-              </a:rPr>
-              <a:t>A restricted runtime — never executes arbitrary code from the network.</a:t>
-            </a:r>
-            <a:endParaRPr lang="en-US" sz="1500" dirty="0"/>
-          </a:p>
-          <a:p>
-            <a:pPr marL="342900" indent="-342900">
-              <a:lnSpc>
-                <a:spcPts val="1700"/>
-              </a:lnSpc>
-              <a:buSzPct val="100000"/>
-              <a:buChar char="•"/>
-            </a:pPr>
-            <a:r>
-              <a:rPr lang="en-US" sz="1500" dirty="0">
-                <a:solidFill>
-                  <a:srgbClr val="3E2A18"/>
-                </a:solidFill>
-                <a:latin typeface="Cormorant" pitchFamily="34" charset="0"/>
-                <a:ea typeface="Cormorant" pitchFamily="34" charset="-122"/>
-                <a:cs typeface="Cormorant" pitchFamily="34" charset="-120"/>
-              </a:rPr>
-              <a:t>Every new integration adds compute, and earns tokens.</a:t>
-            </a:r>
-            <a:endParaRPr lang="en-US" sz="1500" dirty="0"/>
-          </a:p>
-        </p:txBody>
-      </p:sp>
-      <p:sp>
-        <p:nvSpPr>
-          <p:cNvPr id="19" name="Shape 15"/>
-          <p:cNvSpPr/>
-          <p:nvPr/>
-        </p:nvSpPr>
-        <p:spPr>
-          <a:xfrm>
-            <a:off x="685800" y="5440680"/>
-            <a:ext cx="10817352" cy="868680"/>
-          </a:xfrm>
-          <a:prstGeom prst="rect">
-            <a:avLst/>
-          </a:prstGeom>
-          <a:solidFill>
-            <a:srgbClr val="2E2118"/>
-          </a:solidFill>
-          <a:ln/>
-        </p:spPr>
-      </p:sp>
-      <p:sp>
-        <p:nvSpPr>
-          <p:cNvPr id="20" name="Text 16"/>
-          <p:cNvSpPr/>
-          <p:nvPr/>
-        </p:nvSpPr>
-        <p:spPr>
-          <a:xfrm>
-            <a:off x="685800" y="5440680"/>
-            <a:ext cx="10817352" cy="868680"/>
-          </a:xfrm>
-          <a:prstGeom prst="rect">
-            <a:avLst/>
-          </a:prstGeom>
-          <a:noFill/>
-          <a:ln/>
-        </p:spPr>
-        <p:txBody>
-          <a:bodyPr wrap="square" lIns="0" tIns="0" rIns="0" bIns="0" rtlCol="0" anchor="ctr"/>
-          <a:lstStyle/>
-          <a:p>
+              <a:t>more scale</a:t>
+            </a:r>
             <a:pPr algn="ctr" indent="0" marL="0">
               <a:buNone/>
             </a:pPr>
             <a:r>
               <a:rPr lang="en-US" sz="2200" b="1" dirty="0">
                 <a:solidFill>
-                  <a:srgbClr val="F5C5CE"/>
+                  <a:srgbClr val="A8886A"/>
                 </a:solidFill>
                 <a:latin typeface="Gothic A1" pitchFamily="34" charset="0"/>
                 <a:ea typeface="Gothic A1" pitchFamily="34" charset="-122"/>
                 <a:cs typeface="Gothic A1" pitchFamily="34" charset="-120"/>
               </a:rPr>
-              <a:t>More scale</a:t>
+              <a:t>   →   </a:t>
             </a:r>
             <a:pPr algn="ctr" indent="0" marL="0">
               <a:buNone/>
             </a:pPr>
             <a:r>
-              <a:rPr lang="en-US" sz="2200" dirty="0">
-                <a:solidFill>
-                  <a:srgbClr val="A8886A"/>
+              <a:rPr lang="en-US" sz="2200" b="1" dirty="0">
+                <a:solidFill>
+                  <a:srgbClr val="3C7FA8"/>
                 </a:solidFill>
                 <a:latin typeface="Gothic A1" pitchFamily="34" charset="0"/>
                 <a:ea typeface="Gothic A1" pitchFamily="34" charset="-122"/>
                 <a:cs typeface="Gothic A1" pitchFamily="34" charset="-120"/>
               </a:rPr>
-              <a:t>  →  </a:t>
+              <a:t>more search</a:t>
             </a:r>
             <a:pPr algn="ctr" indent="0" marL="0">
               <a:buNone/>
@@ -3171,35 +2943,21 @@
             <a:r>
               <a:rPr lang="en-US" sz="2200" b="1" dirty="0">
                 <a:solidFill>
-                  <a:srgbClr val="6BADD4"/>
+                  <a:srgbClr val="A8886A"/>
                 </a:solidFill>
                 <a:latin typeface="Gothic A1" pitchFamily="34" charset="0"/>
                 <a:ea typeface="Gothic A1" pitchFamily="34" charset="-122"/>
                 <a:cs typeface="Gothic A1" pitchFamily="34" charset="-120"/>
               </a:rPr>
-              <a:t>more search</a:t>
+              <a:t>   →   </a:t>
             </a:r>
             <a:pPr algn="ctr" indent="0" marL="0">
               <a:buNone/>
             </a:pPr>
             <a:r>
-              <a:rPr lang="en-US" sz="2200" dirty="0">
-                <a:solidFill>
-                  <a:srgbClr val="A8886A"/>
-                </a:solidFill>
-                <a:latin typeface="Gothic A1" pitchFamily="34" charset="0"/>
-                <a:ea typeface="Gothic A1" pitchFamily="34" charset="-122"/>
-                <a:cs typeface="Gothic A1" pitchFamily="34" charset="-120"/>
-              </a:rPr>
-              <a:t>  →  </a:t>
-            </a:r>
-            <a:pPr algn="ctr" indent="0" marL="0">
-              <a:buNone/>
-            </a:pPr>
-            <a:r>
               <a:rPr lang="en-US" sz="2200" b="1" dirty="0">
                 <a:solidFill>
-                  <a:srgbClr val="FFFFFF"/>
+                  <a:srgbClr val="2E2118"/>
                 </a:solidFill>
                 <a:latin typeface="Gothic A1" pitchFamily="34" charset="0"/>
                 <a:ea typeface="Gothic A1" pitchFamily="34" charset="-122"/>
@@ -3222,562 +2980,6 @@
 <file path=ppt/slides/slide4.xml><?xml version="1.0" encoding="utf-8"?>
 <p:sld xmlns:a="http://schemas.openxmlformats.org/drawingml/2006/main" xmlns:r="http://schemas.openxmlformats.org/officeDocument/2006/relationships" xmlns:p="http://schemas.openxmlformats.org/presentationml/2006/main">
   <p:cSld name="Slide 4">
-    <p:bg>
-      <p:bgPr>
-        <a:solidFill>
-          <a:srgbClr val="F5F0EA"/>
-        </a:solidFill>
-      </p:bgPr>
-    </p:bg>
-    <p:spTree>
-      <p:nvGrpSpPr>
-        <p:cNvPr id="1" name=""/>
-        <p:cNvGrpSpPr/>
-        <p:nvPr/>
-      </p:nvGrpSpPr>
-      <p:grpSpPr>
-        <a:xfrm>
-          <a:off x="0" y="0"/>
-          <a:ext cx="0" cy="0"/>
-          <a:chOff x="0" y="0"/>
-          <a:chExt cx="0" cy="0"/>
-        </a:xfrm>
-      </p:grpSpPr>
-      <p:sp>
-        <p:nvSpPr>
-          <p:cNvPr id="2" name="Shape 0"/>
-          <p:cNvSpPr/>
-          <p:nvPr/>
-        </p:nvSpPr>
-        <p:spPr>
-          <a:xfrm>
-            <a:off x="685800" y="740664"/>
-            <a:ext cx="91440" cy="91440"/>
-          </a:xfrm>
-          <a:prstGeom prst="ellipse">
-            <a:avLst/>
-          </a:prstGeom>
-          <a:solidFill>
-            <a:srgbClr val="C04B6E"/>
-          </a:solidFill>
-          <a:ln/>
-        </p:spPr>
-      </p:sp>
-      <p:sp>
-        <p:nvSpPr>
-          <p:cNvPr id="3" name="Text 1"/>
-          <p:cNvSpPr/>
-          <p:nvPr/>
-        </p:nvSpPr>
-        <p:spPr>
-          <a:xfrm>
-            <a:off x="886968" y="640080"/>
-            <a:ext cx="7315200" cy="365760"/>
-          </a:xfrm>
-          <a:prstGeom prst="rect">
-            <a:avLst/>
-          </a:prstGeom>
-          <a:noFill/>
-          <a:ln/>
-        </p:spPr>
-        <p:txBody>
-          <a:bodyPr wrap="square" lIns="0" tIns="0" rIns="0" bIns="0" rtlCol="0" anchor="ctr"/>
-          <a:lstStyle/>
-          <a:p>
-            <a:pPr algn="l" indent="0" marL="0">
-              <a:buNone/>
-            </a:pPr>
-            <a:r>
-              <a:rPr lang="en-US" sz="1700" spc="100" kern="0" dirty="0">
-                <a:solidFill>
-                  <a:srgbClr val="3E2A18"/>
-                </a:solidFill>
-                <a:latin typeface="Cormorant" pitchFamily="34" charset="0"/>
-                <a:ea typeface="Cormorant" pitchFamily="34" charset="-122"/>
-                <a:cs typeface="Cormorant" pitchFamily="34" charset="-120"/>
-              </a:rPr>
-              <a:t>The economy</a:t>
-            </a:r>
-            <a:endParaRPr lang="en-US" sz="1700" dirty="0"/>
-          </a:p>
-        </p:txBody>
-      </p:sp>
-      <p:sp>
-        <p:nvSpPr>
-          <p:cNvPr id="4" name="Text 2"/>
-          <p:cNvSpPr/>
-          <p:nvPr/>
-        </p:nvSpPr>
-        <p:spPr>
-          <a:xfrm>
-            <a:off x="640080" y="1005840"/>
-            <a:ext cx="10972800" cy="731520"/>
-          </a:xfrm>
-          <a:prstGeom prst="rect">
-            <a:avLst/>
-          </a:prstGeom>
-          <a:noFill/>
-          <a:ln/>
-        </p:spPr>
-        <p:txBody>
-          <a:bodyPr wrap="square" lIns="0" tIns="0" rIns="0" bIns="0" rtlCol="0" anchor="ctr"/>
-          <a:lstStyle/>
-          <a:p>
-            <a:pPr indent="0" marL="0">
-              <a:buNone/>
-            </a:pPr>
-            <a:r>
-              <a:rPr lang="en-US" sz="3600" b="1" dirty="0">
-                <a:solidFill>
-                  <a:srgbClr val="2E2118"/>
-                </a:solidFill>
-                <a:latin typeface="Gothic A1" pitchFamily="34" charset="0"/>
-                <a:ea typeface="Gothic A1" pitchFamily="34" charset="-122"/>
-                <a:cs typeface="Gothic A1" pitchFamily="34" charset="-120"/>
-              </a:rPr>
-              <a:t>A token that rewards useful work</a:t>
-            </a:r>
-            <a:endParaRPr lang="en-US" sz="3600" dirty="0"/>
-          </a:p>
-        </p:txBody>
-      </p:sp>
-      <p:sp>
-        <p:nvSpPr>
-          <p:cNvPr id="5" name="Text 3"/>
-          <p:cNvSpPr/>
-          <p:nvPr/>
-        </p:nvSpPr>
-        <p:spPr>
-          <a:xfrm>
-            <a:off x="685800" y="1783080"/>
-            <a:ext cx="10515600" cy="457200"/>
-          </a:xfrm>
-          <a:prstGeom prst="rect">
-            <a:avLst/>
-          </a:prstGeom>
-          <a:noFill/>
-          <a:ln/>
-        </p:spPr>
-        <p:txBody>
-          <a:bodyPr wrap="square" lIns="0" tIns="0" rIns="0" bIns="0" rtlCol="0" anchor="ctr"/>
-          <a:lstStyle/>
-          <a:p>
-            <a:pPr indent="0" marL="0">
-              <a:buNone/>
-            </a:pPr>
-            <a:r>
-              <a:rPr lang="en-US" sz="1800" i="1" dirty="0">
-                <a:solidFill>
-                  <a:srgbClr val="6B4F35"/>
-                </a:solidFill>
-                <a:latin typeface="Cormorant" pitchFamily="34" charset="0"/>
-                <a:ea typeface="Cormorant" pitchFamily="34" charset="-122"/>
-                <a:cs typeface="Cormorant" pitchFamily="34" charset="-120"/>
-              </a:rPr>
-              <a:t>Utility token. No premine, no ICO. Capped, decaying emission. The economy axis is accounting, not gambling.</a:t>
-            </a:r>
-            <a:endParaRPr lang="en-US" sz="1800" dirty="0"/>
-          </a:p>
-        </p:txBody>
-      </p:sp>
-      <p:sp>
-        <p:nvSpPr>
-          <p:cNvPr id="6" name="Shape 4"/>
-          <p:cNvSpPr/>
-          <p:nvPr/>
-        </p:nvSpPr>
-        <p:spPr>
-          <a:xfrm>
-            <a:off x="685800" y="2514600"/>
-            <a:ext cx="5486400" cy="1417320"/>
-          </a:xfrm>
-          <a:prstGeom prst="rect">
-            <a:avLst/>
-          </a:prstGeom>
-          <a:solidFill>
-            <a:srgbClr val="FFFFFF"/>
-          </a:solidFill>
-          <a:ln/>
-        </p:spPr>
-      </p:sp>
-      <p:sp>
-        <p:nvSpPr>
-          <p:cNvPr id="7" name="Shape 5"/>
-          <p:cNvSpPr/>
-          <p:nvPr/>
-        </p:nvSpPr>
-        <p:spPr>
-          <a:xfrm>
-            <a:off x="960120" y="2862072"/>
-            <a:ext cx="658368" cy="658368"/>
-          </a:xfrm>
-          <a:prstGeom prst="ellipse">
-            <a:avLst/>
-          </a:prstGeom>
-          <a:solidFill>
-            <a:srgbClr val="3C7FA8"/>
-          </a:solidFill>
-          <a:ln/>
-        </p:spPr>
-      </p:sp>
-      <p:pic>
-        <p:nvPicPr>
-          <p:cNvPr id="8" name="Image 0" descr="preencoded.png">    </p:cNvPr>
-          <p:cNvPicPr>
-            <a:picLocks noChangeAspect="1"/>
-          </p:cNvPicPr>
-          <p:nvPr/>
-        </p:nvPicPr>
-        <p:blipFill>
-          <a:blip r:embed="rId1"/>
-          <a:stretch>
-            <a:fillRect/>
-          </a:stretch>
-        </p:blipFill>
-        <p:spPr>
-          <a:xfrm>
-            <a:off x="1124712" y="3026664"/>
-            <a:ext cx="329184" cy="329184"/>
-          </a:xfrm>
-          <a:prstGeom prst="rect">
-            <a:avLst/>
-          </a:prstGeom>
-        </p:spPr>
-      </p:pic>
-      <p:sp>
-        <p:nvSpPr>
-          <p:cNvPr id="9" name="Text 6"/>
-          <p:cNvSpPr/>
-          <p:nvPr/>
-        </p:nvSpPr>
-        <p:spPr>
-          <a:xfrm>
-            <a:off x="1828800" y="2770632"/>
-            <a:ext cx="4114800" cy="365760"/>
-          </a:xfrm>
-          <a:prstGeom prst="rect">
-            <a:avLst/>
-          </a:prstGeom>
-          <a:noFill/>
-          <a:ln/>
-        </p:spPr>
-        <p:txBody>
-          <a:bodyPr wrap="square" lIns="0" tIns="0" rIns="0" bIns="0" rtlCol="0" anchor="ctr"/>
-          <a:lstStyle/>
-          <a:p>
-            <a:pPr indent="0" marL="0">
-              <a:buNone/>
-            </a:pPr>
-            <a:r>
-              <a:rPr lang="en-US" sz="1900" b="1" dirty="0">
-                <a:solidFill>
-                  <a:srgbClr val="2E2118"/>
-                </a:solidFill>
-                <a:latin typeface="Gothic A1" pitchFamily="34" charset="0"/>
-                <a:ea typeface="Gothic A1" pitchFamily="34" charset="-122"/>
-                <a:cs typeface="Gothic A1" pitchFamily="34" charset="-120"/>
-              </a:rPr>
-              <a:t>Compute rewards</a:t>
-            </a:r>
-            <a:endParaRPr lang="en-US" sz="1900" dirty="0"/>
-          </a:p>
-        </p:txBody>
-      </p:sp>
-      <p:sp>
-        <p:nvSpPr>
-          <p:cNvPr id="10" name="Text 7"/>
-          <p:cNvSpPr/>
-          <p:nvPr/>
-        </p:nvSpPr>
-        <p:spPr>
-          <a:xfrm>
-            <a:off x="1828800" y="3136392"/>
-            <a:ext cx="4114800" cy="731520"/>
-          </a:xfrm>
-          <a:prstGeom prst="rect">
-            <a:avLst/>
-          </a:prstGeom>
-          <a:noFill/>
-          <a:ln/>
-        </p:spPr>
-        <p:txBody>
-          <a:bodyPr wrap="square" lIns="0" tIns="0" rIns="0" bIns="0" rtlCol="0" anchor="ctr"/>
-          <a:lstStyle/>
-          <a:p>
-            <a:pPr indent="0" marL="0">
-              <a:lnSpc>
-                <a:spcPts val="1800"/>
-              </a:lnSpc>
-              <a:buNone/>
-            </a:pPr>
-            <a:r>
-              <a:rPr lang="en-US" sz="1500" dirty="0">
-                <a:solidFill>
-                  <a:srgbClr val="6B4F35"/>
-                </a:solidFill>
-                <a:latin typeface="Cormorant" pitchFamily="34" charset="0"/>
-                <a:ea typeface="Cormorant" pitchFamily="34" charset="-122"/>
-                <a:cs typeface="Cormorant" pitchFamily="34" charset="-120"/>
-              </a:rPr>
-              <a:t>Contribute verified compute, earn tokens. Proof of Useful Work — reward scales with compute × usefulness.</a:t>
-            </a:r>
-            <a:endParaRPr lang="en-US" sz="1500" dirty="0"/>
-          </a:p>
-        </p:txBody>
-      </p:sp>
-      <p:sp>
-        <p:nvSpPr>
-          <p:cNvPr id="11" name="Shape 8"/>
-          <p:cNvSpPr/>
-          <p:nvPr/>
-        </p:nvSpPr>
-        <p:spPr>
-          <a:xfrm>
-            <a:off x="685800" y="4114800"/>
-            <a:ext cx="5486400" cy="1417320"/>
-          </a:xfrm>
-          <a:prstGeom prst="rect">
-            <a:avLst/>
-          </a:prstGeom>
-          <a:solidFill>
-            <a:srgbClr val="FFFFFF"/>
-          </a:solidFill>
-          <a:ln/>
-        </p:spPr>
-      </p:sp>
-      <p:sp>
-        <p:nvSpPr>
-          <p:cNvPr id="12" name="Shape 9"/>
-          <p:cNvSpPr/>
-          <p:nvPr/>
-        </p:nvSpPr>
-        <p:spPr>
-          <a:xfrm>
-            <a:off x="960120" y="4462272"/>
-            <a:ext cx="658368" cy="658368"/>
-          </a:xfrm>
-          <a:prstGeom prst="ellipse">
-            <a:avLst/>
-          </a:prstGeom>
-          <a:solidFill>
-            <a:srgbClr val="C04B6E"/>
-          </a:solidFill>
-          <a:ln/>
-        </p:spPr>
-      </p:sp>
-      <p:pic>
-        <p:nvPicPr>
-          <p:cNvPr id="13" name="Image 1" descr="preencoded.png">    </p:cNvPr>
-          <p:cNvPicPr>
-            <a:picLocks noChangeAspect="1"/>
-          </p:cNvPicPr>
-          <p:nvPr/>
-        </p:nvPicPr>
-        <p:blipFill>
-          <a:blip r:embed="rId2"/>
-          <a:stretch>
-            <a:fillRect/>
-          </a:stretch>
-        </p:blipFill>
-        <p:spPr>
-          <a:xfrm>
-            <a:off x="1124712" y="4626864"/>
-            <a:ext cx="329184" cy="329184"/>
-          </a:xfrm>
-          <a:prstGeom prst="rect">
-            <a:avLst/>
-          </a:prstGeom>
-        </p:spPr>
-      </p:pic>
-      <p:sp>
-        <p:nvSpPr>
-          <p:cNvPr id="14" name="Text 10"/>
-          <p:cNvSpPr/>
-          <p:nvPr/>
-        </p:nvSpPr>
-        <p:spPr>
-          <a:xfrm>
-            <a:off x="1828800" y="4370832"/>
-            <a:ext cx="4114800" cy="365760"/>
-          </a:xfrm>
-          <a:prstGeom prst="rect">
-            <a:avLst/>
-          </a:prstGeom>
-          <a:noFill/>
-          <a:ln/>
-        </p:spPr>
-        <p:txBody>
-          <a:bodyPr wrap="square" lIns="0" tIns="0" rIns="0" bIns="0" rtlCol="0" anchor="ctr"/>
-          <a:lstStyle/>
-          <a:p>
-            <a:pPr indent="0" marL="0">
-              <a:buNone/>
-            </a:pPr>
-            <a:r>
-              <a:rPr lang="en-US" sz="1900" b="1" dirty="0">
-                <a:solidFill>
-                  <a:srgbClr val="2E2118"/>
-                </a:solidFill>
-                <a:latin typeface="Gothic A1" pitchFamily="34" charset="0"/>
-                <a:ea typeface="Gothic A1" pitchFamily="34" charset="-122"/>
-                <a:cs typeface="Gothic A1" pitchFamily="34" charset="-120"/>
-              </a:rPr>
-              <a:t>Bounties</a:t>
-            </a:r>
-            <a:endParaRPr lang="en-US" sz="1900" dirty="0"/>
-          </a:p>
-        </p:txBody>
-      </p:sp>
-      <p:sp>
-        <p:nvSpPr>
-          <p:cNvPr id="15" name="Text 11"/>
-          <p:cNvSpPr/>
-          <p:nvPr/>
-        </p:nvSpPr>
-        <p:spPr>
-          <a:xfrm>
-            <a:off x="1828800" y="4736592"/>
-            <a:ext cx="4114800" cy="731520"/>
-          </a:xfrm>
-          <a:prstGeom prst="rect">
-            <a:avLst/>
-          </a:prstGeom>
-          <a:noFill/>
-          <a:ln/>
-        </p:spPr>
-        <p:txBody>
-          <a:bodyPr wrap="square" lIns="0" tIns="0" rIns="0" bIns="0" rtlCol="0" anchor="ctr"/>
-          <a:lstStyle/>
-          <a:p>
-            <a:pPr indent="0" marL="0">
-              <a:lnSpc>
-                <a:spcPts val="1800"/>
-              </a:lnSpc>
-              <a:buNone/>
-            </a:pPr>
-            <a:r>
-              <a:rPr lang="en-US" sz="1500" dirty="0">
-                <a:solidFill>
-                  <a:srgbClr val="6B4F35"/>
-                </a:solidFill>
-                <a:latin typeface="Cormorant" pitchFamily="34" charset="0"/>
-                <a:ea typeface="Cormorant" pitchFamily="34" charset="-122"/>
-                <a:cs typeface="Cormorant" pitchFamily="34" charset="-120"/>
-              </a:rPr>
-              <a:t>Sponsors fund bounties to steer compute toward specific breakthroughs. Earn by solving them.</a:t>
-            </a:r>
-            <a:endParaRPr lang="en-US" sz="1500" dirty="0"/>
-          </a:p>
-        </p:txBody>
-      </p:sp>
-      <p:sp>
-        <p:nvSpPr>
-          <p:cNvPr id="16" name="Text 12"/>
-          <p:cNvSpPr/>
-          <p:nvPr/>
-        </p:nvSpPr>
-        <p:spPr>
-          <a:xfrm>
-            <a:off x="6583680" y="2377440"/>
-            <a:ext cx="4937760" cy="365760"/>
-          </a:xfrm>
-          <a:prstGeom prst="rect">
-            <a:avLst/>
-          </a:prstGeom>
-          <a:noFill/>
-          <a:ln/>
-        </p:spPr>
-        <p:txBody>
-          <a:bodyPr wrap="square" lIns="0" tIns="0" rIns="0" bIns="0" rtlCol="0" anchor="ctr"/>
-          <a:lstStyle/>
-          <a:p>
-            <a:pPr indent="0" marL="0">
-              <a:buNone/>
-            </a:pPr>
-            <a:r>
-              <a:rPr lang="en-US" sz="1600" b="1" dirty="0">
-                <a:solidFill>
-                  <a:srgbClr val="2E2118"/>
-                </a:solidFill>
-                <a:latin typeface="Gothic A1" pitchFamily="34" charset="0"/>
-                <a:ea typeface="Gothic A1" pitchFamily="34" charset="-122"/>
-                <a:cs typeface="Gothic A1" pitchFamily="34" charset="-120"/>
-              </a:rPr>
-              <a:t>Capped, decaying emission</a:t>
-            </a:r>
-            <a:endParaRPr lang="en-US" sz="1600" dirty="0"/>
-          </a:p>
-        </p:txBody>
-      </p:sp>
-      <p:graphicFrame>
-        <p:nvGraphicFramePr>
-          <p:cNvPr id="17" name="Chart 0" descr=""/>
-          <p:cNvGraphicFramePr/>
-          <p:nvPr/>
-        </p:nvGraphicFramePr>
-        <p:xfrm>
-          <a:off x="6400800" y="2743200"/>
-          <a:ext cx="5120640" cy="2651760"/>
-        </p:xfrm>
-        <a:graphic xmlns:a="http://schemas.openxmlformats.org/drawingml/2006/main">
-          <a:graphicData uri="http://schemas.openxmlformats.org/drawingml/2006/chart">
-            <c:chart xmlns:c="http://schemas.openxmlformats.org/drawingml/2006/chart" r:id="rId3"/>
-          </a:graphicData>
-        </a:graphic>
-      </p:graphicFrame>
-      <p:sp>
-        <p:nvSpPr>
-          <p:cNvPr id="18" name="Text 13"/>
-          <p:cNvSpPr/>
-          <p:nvPr/>
-        </p:nvSpPr>
-        <p:spPr>
-          <a:xfrm>
-            <a:off x="6400800" y="5486400"/>
-            <a:ext cx="5120640" cy="731520"/>
-          </a:xfrm>
-          <a:prstGeom prst="rect">
-            <a:avLst/>
-          </a:prstGeom>
-          <a:noFill/>
-          <a:ln/>
-        </p:spPr>
-        <p:txBody>
-          <a:bodyPr wrap="square" lIns="0" tIns="0" rIns="0" bIns="0" rtlCol="0" anchor="ctr"/>
-          <a:lstStyle/>
-          <a:p>
-            <a:pPr indent="0" marL="0">
-              <a:lnSpc>
-                <a:spcPts val="1600"/>
-              </a:lnSpc>
-              <a:buNone/>
-            </a:pPr>
-            <a:r>
-              <a:rPr lang="en-US" sz="1350" dirty="0">
-                <a:solidFill>
-                  <a:srgbClr val="6B4F35"/>
-                </a:solidFill>
-                <a:latin typeface="Cormorant" pitchFamily="34" charset="0"/>
-                <a:ea typeface="Cormorant" pitchFamily="34" charset="-122"/>
-                <a:cs typeface="Cormorant" pitchFamily="34" charset="-120"/>
-              </a:rPr>
-              <a:t>Early contributors earn more; tapering shifts the network from growth to efficiency incentives — better algorithms, not just more hardware.</a:t>
-            </a:r>
-            <a:endParaRPr lang="en-US" sz="1350" dirty="0"/>
-          </a:p>
-        </p:txBody>
-      </p:sp>
-    </p:spTree>
-  </p:cSld>
-  <p:clrMapOvr>
-    <a:masterClrMapping/>
-  </p:clrMapOvr>
-</p:sld>
-</file>
-
-<file path=ppt/slides/slide5.xml><?xml version="1.0" encoding="utf-8"?>
-<p:sld xmlns:a="http://schemas.openxmlformats.org/drawingml/2006/main" xmlns:r="http://schemas.openxmlformats.org/officeDocument/2006/relationships" xmlns:p="http://schemas.openxmlformats.org/presentationml/2006/main">
-  <p:cSld name="Slide 5">
     <p:bg>
       <p:bgPr>
         <a:blipFill dpi="0" rotWithShape="1">
@@ -3806,9 +3008,169 @@
           <a:chExt cx="0" cy="0"/>
         </a:xfrm>
       </p:grpSpPr>
+      <p:sp>
+        <p:nvSpPr>
+          <p:cNvPr id="2" name="Shape 0"/>
+          <p:cNvSpPr/>
+          <p:nvPr/>
+        </p:nvSpPr>
+        <p:spPr>
+          <a:xfrm>
+            <a:off x="822960" y="731520"/>
+            <a:ext cx="73152" cy="73152"/>
+          </a:xfrm>
+          <a:prstGeom prst="ellipse">
+            <a:avLst/>
+          </a:prstGeom>
+          <a:solidFill>
+            <a:srgbClr val="C04B6E"/>
+          </a:solidFill>
+          <a:ln/>
+        </p:spPr>
+      </p:sp>
+      <p:sp>
+        <p:nvSpPr>
+          <p:cNvPr id="3" name="Text 1"/>
+          <p:cNvSpPr/>
+          <p:nvPr/>
+        </p:nvSpPr>
+        <p:spPr>
+          <a:xfrm>
+            <a:off x="1005840" y="640080"/>
+            <a:ext cx="8229600" cy="329184"/>
+          </a:xfrm>
+          <a:prstGeom prst="rect">
+            <a:avLst/>
+          </a:prstGeom>
+          <a:noFill/>
+          <a:ln/>
+        </p:spPr>
+        <p:txBody>
+          <a:bodyPr wrap="square" lIns="0" tIns="0" rIns="0" bIns="0" rtlCol="0" anchor="ctr"/>
+          <a:lstStyle/>
+          <a:p>
+            <a:pPr indent="0" marL="0">
+              <a:buNone/>
+            </a:pPr>
+            <a:r>
+              <a:rPr lang="en-US" sz="1800" spc="50" kern="0" dirty="0">
+                <a:solidFill>
+                  <a:srgbClr val="3E2A18"/>
+                </a:solidFill>
+                <a:latin typeface="Cormorant" pitchFamily="34" charset="0"/>
+                <a:ea typeface="Cormorant" pitchFamily="34" charset="-122"/>
+                <a:cs typeface="Cormorant" pitchFamily="34" charset="-120"/>
+              </a:rPr>
+              <a:t>the economy</a:t>
+            </a:r>
+            <a:endParaRPr lang="en-US" sz="1800" dirty="0"/>
+          </a:p>
+        </p:txBody>
+      </p:sp>
+      <p:sp>
+        <p:nvSpPr>
+          <p:cNvPr id="4" name="Text 2"/>
+          <p:cNvSpPr/>
+          <p:nvPr/>
+        </p:nvSpPr>
+        <p:spPr>
+          <a:xfrm>
+            <a:off x="804672" y="1024128"/>
+            <a:ext cx="10515600" cy="640080"/>
+          </a:xfrm>
+          <a:prstGeom prst="rect">
+            <a:avLst/>
+          </a:prstGeom>
+          <a:noFill/>
+          <a:ln/>
+        </p:spPr>
+        <p:txBody>
+          <a:bodyPr wrap="square" lIns="0" tIns="0" rIns="0" bIns="0" rtlCol="0" anchor="ctr"/>
+          <a:lstStyle/>
+          <a:p>
+            <a:pPr indent="0" marL="0">
+              <a:buNone/>
+            </a:pPr>
+            <a:r>
+              <a:rPr lang="en-US" sz="3600" b="1" dirty="0">
+                <a:solidFill>
+                  <a:srgbClr val="2E2118"/>
+                </a:solidFill>
+                <a:latin typeface="Gothic A1" pitchFamily="34" charset="0"/>
+                <a:ea typeface="Gothic A1" pitchFamily="34" charset="-122"/>
+                <a:cs typeface="Gothic A1" pitchFamily="34" charset="-120"/>
+              </a:rPr>
+              <a:t>A token that rewards useful work</a:t>
+            </a:r>
+            <a:endParaRPr lang="en-US" sz="3600" dirty="0"/>
+          </a:p>
+        </p:txBody>
+      </p:sp>
+      <p:sp>
+        <p:nvSpPr>
+          <p:cNvPr id="5" name="Text 3"/>
+          <p:cNvSpPr/>
+          <p:nvPr/>
+        </p:nvSpPr>
+        <p:spPr>
+          <a:xfrm>
+            <a:off x="822960" y="1755648"/>
+            <a:ext cx="10058400" cy="365760"/>
+          </a:xfrm>
+          <a:prstGeom prst="rect">
+            <a:avLst/>
+          </a:prstGeom>
+          <a:noFill/>
+          <a:ln/>
+        </p:spPr>
+        <p:txBody>
+          <a:bodyPr wrap="square" lIns="0" tIns="0" rIns="0" bIns="0" rtlCol="0" anchor="ctr"/>
+          <a:lstStyle/>
+          <a:p>
+            <a:pPr indent="0" marL="0">
+              <a:buNone/>
+            </a:pPr>
+            <a:r>
+              <a:rPr lang="en-US" sz="1800" i="1" dirty="0">
+                <a:solidFill>
+                  <a:srgbClr val="3E2A18"/>
+                </a:solidFill>
+                <a:latin typeface="Cormorant" pitchFamily="34" charset="0"/>
+                <a:ea typeface="Cormorant" pitchFamily="34" charset="-122"/>
+                <a:cs typeface="Cormorant" pitchFamily="34" charset="-120"/>
+              </a:rPr>
+              <a:t>Utility token. No premine, no ICO. Capped, decaying emission — accounting, not gambling.</a:t>
+            </a:r>
+            <a:endParaRPr lang="en-US" sz="1800" dirty="0"/>
+          </a:p>
+        </p:txBody>
+      </p:sp>
+      <p:sp>
+        <p:nvSpPr>
+          <p:cNvPr id="6" name="Shape 4"/>
+          <p:cNvSpPr/>
+          <p:nvPr/>
+        </p:nvSpPr>
+        <p:spPr>
+          <a:xfrm>
+            <a:off x="822960" y="2788920"/>
+            <a:ext cx="5029200" cy="0"/>
+          </a:xfrm>
+          <a:prstGeom prst="line">
+            <a:avLst/>
+          </a:prstGeom>
+          <a:noFill/>
+          <a:ln w="12700">
+            <a:solidFill>
+              <a:srgbClr val="A8886A"/>
+            </a:solidFill>
+            <a:prstDash val="solid"/>
+          </a:ln>
+        </p:spPr>
+      </p:sp>
       <p:pic>
         <p:nvPicPr>
-          <p:cNvPr id="2" name="Image 0" descr="assets/logo-white.png">    </p:cNvPr>
+          <p:cNvPr id="7" name="Image 0" descr="preencoded.png">    </p:cNvPr>
           <p:cNvPicPr>
             <a:picLocks noChangeAspect="1"/>
           </p:cNvPicPr>
@@ -3822,8 +3184,8 @@
         </p:blipFill>
         <p:spPr>
           <a:xfrm>
-            <a:off x="685800" y="548640"/>
-            <a:ext cx="1220002" cy="411480"/>
+            <a:off x="822960" y="3044952"/>
+            <a:ext cx="329184" cy="329184"/>
           </a:xfrm>
           <a:prstGeom prst="rect">
             <a:avLst/>
@@ -3832,73 +3194,142 @@
       </p:pic>
       <p:sp>
         <p:nvSpPr>
-          <p:cNvPr id="3" name="Shape 0"/>
-          <p:cNvSpPr/>
-          <p:nvPr/>
-        </p:nvSpPr>
-        <p:spPr>
-          <a:xfrm>
-            <a:off x="713232" y="1472184"/>
-            <a:ext cx="91440" cy="91440"/>
-          </a:xfrm>
-          <a:prstGeom prst="ellipse">
-            <a:avLst/>
-          </a:prstGeom>
-          <a:solidFill>
-            <a:srgbClr val="F5C5CE"/>
-          </a:solidFill>
-          <a:ln/>
-        </p:spPr>
-      </p:sp>
-      <p:sp>
-        <p:nvSpPr>
-          <p:cNvPr id="4" name="Text 1"/>
-          <p:cNvSpPr/>
-          <p:nvPr/>
-        </p:nvSpPr>
-        <p:spPr>
-          <a:xfrm>
-            <a:off x="914400" y="1371600"/>
-            <a:ext cx="7315200" cy="365760"/>
-          </a:xfrm>
-          <a:prstGeom prst="rect">
-            <a:avLst/>
-          </a:prstGeom>
-          <a:noFill/>
-          <a:ln/>
-        </p:spPr>
-        <p:txBody>
-          <a:bodyPr wrap="square" lIns="0" tIns="0" rIns="0" bIns="0" rtlCol="0" anchor="ctr"/>
-          <a:lstStyle/>
-          <a:p>
-            <a:pPr algn="l" indent="0" marL="0">
-              <a:buNone/>
-            </a:pPr>
-            <a:r>
-              <a:rPr lang="en-US" sz="1700" spc="100" kern="0" dirty="0">
-                <a:solidFill>
-                  <a:srgbClr val="FFFFFF"/>
+          <p:cNvPr id="8" name="Text 5"/>
+          <p:cNvSpPr/>
+          <p:nvPr/>
+        </p:nvSpPr>
+        <p:spPr>
+          <a:xfrm>
+            <a:off x="1325880" y="3035808"/>
+            <a:ext cx="4480560" cy="365760"/>
+          </a:xfrm>
+          <a:prstGeom prst="rect">
+            <a:avLst/>
+          </a:prstGeom>
+          <a:noFill/>
+          <a:ln/>
+        </p:spPr>
+        <p:txBody>
+          <a:bodyPr wrap="square" lIns="0" tIns="0" rIns="0" bIns="0" rtlCol="0" anchor="ctr"/>
+          <a:lstStyle/>
+          <a:p>
+            <a:pPr indent="0" marL="0">
+              <a:buNone/>
+            </a:pPr>
+            <a:r>
+              <a:rPr lang="en-US" sz="1900" b="1" dirty="0">
+                <a:solidFill>
+                  <a:srgbClr val="2E2118"/>
+                </a:solidFill>
+                <a:latin typeface="Gothic A1" pitchFamily="34" charset="0"/>
+                <a:ea typeface="Gothic A1" pitchFamily="34" charset="-122"/>
+                <a:cs typeface="Gothic A1" pitchFamily="34" charset="-120"/>
+              </a:rPr>
+              <a:t>Compute rewards</a:t>
+            </a:r>
+            <a:endParaRPr lang="en-US" sz="1900" dirty="0"/>
+          </a:p>
+        </p:txBody>
+      </p:sp>
+      <p:sp>
+        <p:nvSpPr>
+          <p:cNvPr id="9" name="Text 6"/>
+          <p:cNvSpPr/>
+          <p:nvPr/>
+        </p:nvSpPr>
+        <p:spPr>
+          <a:xfrm>
+            <a:off x="822960" y="3502152"/>
+            <a:ext cx="4937760" cy="822960"/>
+          </a:xfrm>
+          <a:prstGeom prst="rect">
+            <a:avLst/>
+          </a:prstGeom>
+          <a:noFill/>
+          <a:ln/>
+        </p:spPr>
+        <p:txBody>
+          <a:bodyPr wrap="square" lIns="0" tIns="0" rIns="0" bIns="0" rtlCol="0" anchor="ctr"/>
+          <a:lstStyle/>
+          <a:p>
+            <a:pPr indent="0" marL="0">
+              <a:lnSpc>
+                <a:spcPts val="2000"/>
+              </a:lnSpc>
+              <a:buNone/>
+            </a:pPr>
+            <a:r>
+              <a:rPr lang="en-US" sz="1600" dirty="0">
+                <a:solidFill>
+                  <a:srgbClr val="3E2A18"/>
                 </a:solidFill>
                 <a:latin typeface="Cormorant" pitchFamily="34" charset="0"/>
                 <a:ea typeface="Cormorant" pitchFamily="34" charset="-122"/>
                 <a:cs typeface="Cormorant" pitchFamily="34" charset="-120"/>
               </a:rPr>
-              <a:t>Team &amp; roadmap</a:t>
-            </a:r>
-            <a:endParaRPr lang="en-US" sz="1700" dirty="0"/>
-          </a:p>
-        </p:txBody>
-      </p:sp>
-      <p:sp>
-        <p:nvSpPr>
-          <p:cNvPr id="5" name="Text 2"/>
-          <p:cNvSpPr/>
-          <p:nvPr/>
-        </p:nvSpPr>
-        <p:spPr>
-          <a:xfrm>
-            <a:off x="658368" y="1737360"/>
-            <a:ext cx="10972800" cy="731520"/>
+              <a:t>Contribute verified compute, earn tokens. Reward scales with compute × usefulness — Proof of Useful Work.</a:t>
+            </a:r>
+            <a:endParaRPr lang="en-US" sz="1600" dirty="0"/>
+          </a:p>
+        </p:txBody>
+      </p:sp>
+      <p:sp>
+        <p:nvSpPr>
+          <p:cNvPr id="10" name="Shape 7"/>
+          <p:cNvSpPr/>
+          <p:nvPr/>
+        </p:nvSpPr>
+        <p:spPr>
+          <a:xfrm>
+            <a:off x="822960" y="4480560"/>
+            <a:ext cx="5029200" cy="0"/>
+          </a:xfrm>
+          <a:prstGeom prst="line">
+            <a:avLst/>
+          </a:prstGeom>
+          <a:noFill/>
+          <a:ln w="12700">
+            <a:solidFill>
+              <a:srgbClr val="A8886A"/>
+            </a:solidFill>
+            <a:prstDash val="solid"/>
+          </a:ln>
+        </p:spPr>
+      </p:sp>
+      <p:pic>
+        <p:nvPicPr>
+          <p:cNvPr id="11" name="Image 1" descr="preencoded.png">    </p:cNvPr>
+          <p:cNvPicPr>
+            <a:picLocks noChangeAspect="1"/>
+          </p:cNvPicPr>
+          <p:nvPr/>
+        </p:nvPicPr>
+        <p:blipFill>
+          <a:blip r:embed="rId3"/>
+          <a:stretch>
+            <a:fillRect/>
+          </a:stretch>
+        </p:blipFill>
+        <p:spPr>
+          <a:xfrm>
+            <a:off x="822960" y="4736592"/>
+            <a:ext cx="329184" cy="329184"/>
+          </a:xfrm>
+          <a:prstGeom prst="rect">
+            <a:avLst/>
+          </a:prstGeom>
+        </p:spPr>
+      </p:pic>
+      <p:sp>
+        <p:nvSpPr>
+          <p:cNvPr id="12" name="Text 8"/>
+          <p:cNvSpPr/>
+          <p:nvPr/>
+        </p:nvSpPr>
+        <p:spPr>
+          <a:xfrm>
+            <a:off x="1325880" y="4727448"/>
+            <a:ext cx="4480560" cy="365760"/>
           </a:xfrm>
           <a:prstGeom prst="rect">
             <a:avLst/>
@@ -3914,38 +3345,84 @@
               <a:buNone/>
             </a:pPr>
             <a:r>
-              <a:rPr lang="en-US" sz="3800" b="1" dirty="0">
-                <a:solidFill>
-                  <a:srgbClr val="FFFFFF"/>
+              <a:rPr lang="en-US" sz="1900" b="1" dirty="0">
+                <a:solidFill>
+                  <a:srgbClr val="2E2118"/>
                 </a:solidFill>
                 <a:latin typeface="Gothic A1" pitchFamily="34" charset="0"/>
                 <a:ea typeface="Gothic A1" pitchFamily="34" charset="-122"/>
                 <a:cs typeface="Gothic A1" pitchFamily="34" charset="-120"/>
               </a:rPr>
-              <a:t>Start now. Build in the open.</a:t>
-            </a:r>
-            <a:endParaRPr lang="en-US" sz="3800" dirty="0"/>
-          </a:p>
-        </p:txBody>
-      </p:sp>
-      <p:sp>
-        <p:nvSpPr>
-          <p:cNvPr id="6" name="Shape 3"/>
-          <p:cNvSpPr/>
-          <p:nvPr/>
-        </p:nvSpPr>
-        <p:spPr>
-          <a:xfrm>
-            <a:off x="914400" y="3383280"/>
-            <a:ext cx="8503920" cy="0"/>
-          </a:xfrm>
-          <a:prstGeom prst="line">
-            <a:avLst/>
-          </a:prstGeom>
-          <a:noFill/>
-          <a:ln w="19050">
+              <a:t>Bounties</a:t>
+            </a:r>
+            <a:endParaRPr lang="en-US" sz="1900" dirty="0"/>
+          </a:p>
+        </p:txBody>
+      </p:sp>
+      <p:sp>
+        <p:nvSpPr>
+          <p:cNvPr id="13" name="Text 9"/>
+          <p:cNvSpPr/>
+          <p:nvPr/>
+        </p:nvSpPr>
+        <p:spPr>
+          <a:xfrm>
+            <a:off x="822960" y="5193792"/>
+            <a:ext cx="4937760" cy="822960"/>
+          </a:xfrm>
+          <a:prstGeom prst="rect">
+            <a:avLst/>
+          </a:prstGeom>
+          <a:noFill/>
+          <a:ln/>
+        </p:spPr>
+        <p:txBody>
+          <a:bodyPr wrap="square" lIns="0" tIns="0" rIns="0" bIns="0" rtlCol="0" anchor="ctr"/>
+          <a:lstStyle/>
+          <a:p>
+            <a:pPr indent="0" marL="0">
+              <a:lnSpc>
+                <a:spcPts val="2000"/>
+              </a:lnSpc>
+              <a:buNone/>
+            </a:pPr>
+            <a:r>
+              <a:rPr lang="en-US" sz="1600" dirty="0">
+                <a:solidFill>
+                  <a:srgbClr val="3E2A18"/>
+                </a:solidFill>
+                <a:latin typeface="Cormorant" pitchFamily="34" charset="0"/>
+                <a:ea typeface="Cormorant" pitchFamily="34" charset="-122"/>
+                <a:cs typeface="Cormorant" pitchFamily="34" charset="-120"/>
+              </a:rPr>
+              <a:t>Sponsors fund bounties to steer compute toward targeted breakthroughs. Solve them, earn the pool.</a:t>
+            </a:r>
+            <a:endParaRPr lang="en-US" sz="1600" dirty="0"/>
+          </a:p>
+        </p:txBody>
+      </p:sp>
+      <p:sp>
+        <p:nvSpPr>
+          <p:cNvPr id="14" name="Shape 10"/>
+          <p:cNvSpPr/>
+          <p:nvPr/>
+        </p:nvSpPr>
+        <p:spPr>
+          <a:xfrm>
+            <a:off x="6400800" y="2788920"/>
+            <a:ext cx="4937760" cy="2788920"/>
+          </a:xfrm>
+          <a:prstGeom prst="roundRect">
+            <a:avLst>
+              <a:gd name="adj" fmla="val 3279"/>
+            </a:avLst>
+          </a:prstGeom>
+          <a:solidFill>
+            <a:srgbClr val="FFFFFF"/>
+          </a:solidFill>
+          <a:ln w="12700">
             <a:solidFill>
-              <a:srgbClr val="6BADD4"/>
+              <a:srgbClr val="D6D9DC"/>
             </a:solidFill>
             <a:prstDash val="solid"/>
           </a:ln>
@@ -3953,39 +3430,14 @@
       </p:sp>
       <p:sp>
         <p:nvSpPr>
-          <p:cNvPr id="7" name="Shape 4"/>
-          <p:cNvSpPr/>
-          <p:nvPr/>
-        </p:nvSpPr>
-        <p:spPr>
-          <a:xfrm>
-            <a:off x="822960" y="3291840"/>
-            <a:ext cx="182880" cy="182880"/>
-          </a:xfrm>
-          <a:prstGeom prst="ellipse">
-            <a:avLst/>
-          </a:prstGeom>
-          <a:solidFill>
-            <a:srgbClr val="F5C5CE"/>
-          </a:solidFill>
-          <a:ln w="19050">
-            <a:solidFill>
-              <a:srgbClr val="FFFFFF"/>
-            </a:solidFill>
-            <a:prstDash val="solid"/>
-          </a:ln>
-        </p:spPr>
-      </p:sp>
-      <p:sp>
-        <p:nvSpPr>
-          <p:cNvPr id="8" name="Text 5"/>
-          <p:cNvSpPr/>
-          <p:nvPr/>
-        </p:nvSpPr>
-        <p:spPr>
-          <a:xfrm>
-            <a:off x="777240" y="3611880"/>
-            <a:ext cx="2468880" cy="320040"/>
+          <p:cNvPr id="15" name="Text 11"/>
+          <p:cNvSpPr/>
+          <p:nvPr/>
+        </p:nvSpPr>
+        <p:spPr>
+          <a:xfrm>
+            <a:off x="6720840" y="3017520"/>
+            <a:ext cx="3657600" cy="274320"/>
           </a:xfrm>
           <a:prstGeom prst="rect">
             <a:avLst/>
@@ -4001,69 +3453,46 @@
               <a:buNone/>
             </a:pPr>
             <a:r>
-              <a:rPr lang="en-US" sz="1500" b="1" dirty="0">
-                <a:solidFill>
-                  <a:srgbClr val="F5C5CE"/>
-                </a:solidFill>
-                <a:latin typeface="Gothic A1" pitchFamily="34" charset="0"/>
-                <a:ea typeface="Gothic A1" pitchFamily="34" charset="-122"/>
-                <a:cs typeface="Gothic A1" pitchFamily="34" charset="-120"/>
-              </a:rPr>
-              <a:t>Now</a:t>
-            </a:r>
-            <a:endParaRPr lang="en-US" sz="1500" dirty="0"/>
-          </a:p>
-        </p:txBody>
-      </p:sp>
-      <p:sp>
-        <p:nvSpPr>
-          <p:cNvPr id="9" name="Text 6"/>
-          <p:cNvSpPr/>
-          <p:nvPr/>
-        </p:nvSpPr>
-        <p:spPr>
-          <a:xfrm>
-            <a:off x="777240" y="3950208"/>
-            <a:ext cx="2468880" cy="365760"/>
-          </a:xfrm>
-          <a:prstGeom prst="rect">
-            <a:avLst/>
-          </a:prstGeom>
-          <a:noFill/>
-          <a:ln/>
-        </p:spPr>
-        <p:txBody>
-          <a:bodyPr wrap="square" lIns="0" tIns="0" rIns="0" bIns="0" rtlCol="0" anchor="ctr"/>
-          <a:lstStyle/>
-          <a:p>
-            <a:pPr indent="0" marL="0">
-              <a:buNone/>
-            </a:pPr>
-            <a:r>
-              <a:rPr lang="en-US" sz="1800" b="1" dirty="0">
-                <a:solidFill>
-                  <a:srgbClr val="FFFFFF"/>
-                </a:solidFill>
-                <a:latin typeface="Gothic A1" pitchFamily="34" charset="0"/>
-                <a:ea typeface="Gothic A1" pitchFamily="34" charset="-122"/>
-                <a:cs typeface="Gothic A1" pitchFamily="34" charset="-120"/>
-              </a:rPr>
-              <a:t>Launch</a:t>
-            </a:r>
-            <a:endParaRPr lang="en-US" sz="1800" dirty="0"/>
-          </a:p>
-        </p:txBody>
-      </p:sp>
-      <p:sp>
-        <p:nvSpPr>
-          <p:cNvPr id="10" name="Text 7"/>
-          <p:cNvSpPr/>
-          <p:nvPr/>
-        </p:nvSpPr>
-        <p:spPr>
-          <a:xfrm>
-            <a:off x="777240" y="4343400"/>
-            <a:ext cx="2468880" cy="1005840"/>
+              <a:rPr lang="en-US" sz="1100" spc="200" kern="0" dirty="0">
+                <a:solidFill>
+                  <a:srgbClr val="5C6B7A"/>
+                </a:solidFill>
+                <a:latin typeface="Courier New" pitchFamily="34" charset="0"/>
+                <a:ea typeface="Courier New" pitchFamily="34" charset="-122"/>
+                <a:cs typeface="Courier New" pitchFamily="34" charset="-120"/>
+              </a:rPr>
+              <a:t>EMISSION  /  EPOCH</a:t>
+            </a:r>
+            <a:endParaRPr lang="en-US" sz="1100" dirty="0"/>
+          </a:p>
+        </p:txBody>
+      </p:sp>
+      <p:graphicFrame>
+        <p:nvGraphicFramePr>
+          <p:cNvPr id="16" name="Chart 0" descr=""/>
+          <p:cNvGraphicFramePr/>
+          <p:nvPr/>
+        </p:nvGraphicFramePr>
+        <p:xfrm>
+          <a:off x="6537960" y="3337560"/>
+          <a:ext cx="4572000" cy="1965960"/>
+        </p:xfrm>
+        <a:graphic xmlns:a="http://schemas.openxmlformats.org/drawingml/2006/main">
+          <a:graphicData uri="http://schemas.openxmlformats.org/drawingml/2006/chart">
+            <c:chart xmlns:c="http://schemas.openxmlformats.org/drawingml/2006/chart" r:id="rId4"/>
+          </a:graphicData>
+        </a:graphic>
+      </p:graphicFrame>
+      <p:sp>
+        <p:nvSpPr>
+          <p:cNvPr id="17" name="Text 12"/>
+          <p:cNvSpPr/>
+          <p:nvPr/>
+        </p:nvSpPr>
+        <p:spPr>
+          <a:xfrm>
+            <a:off x="6400800" y="5715000"/>
+            <a:ext cx="4937760" cy="731520"/>
           </a:xfrm>
           <a:prstGeom prst="rect">
             <a:avLst/>
@@ -4082,30 +3511,86 @@
               <a:buNone/>
             </a:pPr>
             <a:r>
-              <a:rPr lang="en-US" sz="1450" dirty="0">
-                <a:solidFill>
-                  <a:srgbClr val="C8DFF0"/>
+              <a:rPr lang="en-US" sz="1400" dirty="0">
+                <a:solidFill>
+                  <a:srgbClr val="3E2A18"/>
                 </a:solidFill>
                 <a:latin typeface="Cormorant" pitchFamily="34" charset="0"/>
                 <a:ea typeface="Cormorant" pitchFamily="34" charset="-122"/>
                 <a:cs typeface="Cormorant" pitchFamily="34" charset="-120"/>
               </a:rPr>
-              <a:t>Genesis network live in demo mode — wallets, ledger, leaderboard.</a:t>
-            </a:r>
-            <a:endParaRPr lang="en-US" sz="1450" dirty="0"/>
-          </a:p>
-        </p:txBody>
-      </p:sp>
-      <p:sp>
-        <p:nvSpPr>
-          <p:cNvPr id="11" name="Shape 8"/>
-          <p:cNvSpPr/>
-          <p:nvPr/>
-        </p:nvSpPr>
-        <p:spPr>
-          <a:xfrm>
-            <a:off x="3657600" y="3291840"/>
-            <a:ext cx="182880" cy="182880"/>
+              <a:t>Early contributors earn more; tapering shifts the network from growth to efficiency incentives — better algorithms, not just more hardware.</a:t>
+            </a:r>
+            <a:endParaRPr lang="en-US" sz="1400" dirty="0"/>
+          </a:p>
+        </p:txBody>
+      </p:sp>
+    </p:spTree>
+  </p:cSld>
+  <p:clrMapOvr>
+    <a:masterClrMapping/>
+  </p:clrMapOvr>
+</p:sld>
+</file>
+
+<file path=ppt/slides/slide5.xml><?xml version="1.0" encoding="utf-8"?>
+<p:sld xmlns:a="http://schemas.openxmlformats.org/drawingml/2006/main" xmlns:r="http://schemas.openxmlformats.org/officeDocument/2006/relationships" xmlns:p="http://schemas.openxmlformats.org/presentationml/2006/main">
+  <p:cSld name="Slide 5">
+    <p:bg>
+      <p:bgPr>
+        <a:solidFill>
+          <a:srgbClr val="2E2118"/>
+        </a:solidFill>
+      </p:bgPr>
+    </p:bg>
+    <p:spTree>
+      <p:nvGrpSpPr>
+        <p:cNvPr id="1" name=""/>
+        <p:cNvGrpSpPr/>
+        <p:nvPr/>
+      </p:nvGrpSpPr>
+      <p:grpSpPr>
+        <a:xfrm>
+          <a:off x="0" y="0"/>
+          <a:ext cx="0" cy="0"/>
+          <a:chOff x="0" y="0"/>
+          <a:chExt cx="0" cy="0"/>
+        </a:xfrm>
+      </p:grpSpPr>
+      <p:pic>
+        <p:nvPicPr>
+          <p:cNvPr id="2" name="Image 0" descr="assets/logo-white.png">    </p:cNvPr>
+          <p:cNvPicPr>
+            <a:picLocks noChangeAspect="1"/>
+          </p:cNvPicPr>
+          <p:nvPr/>
+        </p:nvPicPr>
+        <p:blipFill>
+          <a:blip r:embed="rId1"/>
+          <a:stretch>
+            <a:fillRect/>
+          </a:stretch>
+        </p:blipFill>
+        <p:spPr>
+          <a:xfrm>
+            <a:off x="822960" y="548640"/>
+            <a:ext cx="1138669" cy="384048"/>
+          </a:xfrm>
+          <a:prstGeom prst="rect">
+            <a:avLst/>
+          </a:prstGeom>
+        </p:spPr>
+      </p:pic>
+      <p:sp>
+        <p:nvSpPr>
+          <p:cNvPr id="3" name="Shape 0"/>
+          <p:cNvSpPr/>
+          <p:nvPr/>
+        </p:nvSpPr>
+        <p:spPr>
+          <a:xfrm>
+            <a:off x="822960" y="1508760"/>
+            <a:ext cx="73152" cy="73152"/>
           </a:xfrm>
           <a:prstGeom prst="ellipse">
             <a:avLst/>
@@ -4113,9 +3598,105 @@
           <a:solidFill>
             <a:srgbClr val="F5C5CE"/>
           </a:solidFill>
-          <a:ln w="19050">
+          <a:ln/>
+        </p:spPr>
+      </p:sp>
+      <p:sp>
+        <p:nvSpPr>
+          <p:cNvPr id="4" name="Text 1"/>
+          <p:cNvSpPr/>
+          <p:nvPr/>
+        </p:nvSpPr>
+        <p:spPr>
+          <a:xfrm>
+            <a:off x="1005840" y="1417320"/>
+            <a:ext cx="8229600" cy="329184"/>
+          </a:xfrm>
+          <a:prstGeom prst="rect">
+            <a:avLst/>
+          </a:prstGeom>
+          <a:noFill/>
+          <a:ln/>
+        </p:spPr>
+        <p:txBody>
+          <a:bodyPr wrap="square" lIns="0" tIns="0" rIns="0" bIns="0" rtlCol="0" anchor="ctr"/>
+          <a:lstStyle/>
+          <a:p>
+            <a:pPr indent="0" marL="0">
+              <a:buNone/>
+            </a:pPr>
+            <a:r>
+              <a:rPr lang="en-US" sz="1800" spc="50" kern="0" dirty="0">
+                <a:solidFill>
+                  <a:srgbClr val="E4D8C8"/>
+                </a:solidFill>
+                <a:latin typeface="Cormorant" pitchFamily="34" charset="0"/>
+                <a:ea typeface="Cormorant" pitchFamily="34" charset="-122"/>
+                <a:cs typeface="Cormorant" pitchFamily="34" charset="-120"/>
+              </a:rPr>
+              <a:t>roadmap</a:t>
+            </a:r>
+            <a:endParaRPr lang="en-US" sz="1800" dirty="0"/>
+          </a:p>
+        </p:txBody>
+      </p:sp>
+      <p:sp>
+        <p:nvSpPr>
+          <p:cNvPr id="5" name="Text 2"/>
+          <p:cNvSpPr/>
+          <p:nvPr/>
+        </p:nvSpPr>
+        <p:spPr>
+          <a:xfrm>
+            <a:off x="804672" y="1828800"/>
+            <a:ext cx="10515600" cy="731520"/>
+          </a:xfrm>
+          <a:prstGeom prst="rect">
+            <a:avLst/>
+          </a:prstGeom>
+          <a:noFill/>
+          <a:ln/>
+        </p:spPr>
+        <p:txBody>
+          <a:bodyPr wrap="square" lIns="0" tIns="0" rIns="0" bIns="0" rtlCol="0" anchor="ctr"/>
+          <a:lstStyle/>
+          <a:p>
+            <a:pPr indent="0" marL="0">
+              <a:buNone/>
+            </a:pPr>
+            <a:r>
+              <a:rPr lang="en-US" sz="4000" b="1" dirty="0">
+                <a:solidFill>
+                  <a:srgbClr val="FFFFFF"/>
+                </a:solidFill>
+                <a:latin typeface="Gothic A1" pitchFamily="34" charset="0"/>
+                <a:ea typeface="Gothic A1" pitchFamily="34" charset="-122"/>
+                <a:cs typeface="Gothic A1" pitchFamily="34" charset="-120"/>
+              </a:rPr>
+              <a:t>Start now. Build in the open.</a:t>
+            </a:r>
+            <a:endParaRPr lang="en-US" sz="4000" dirty="0"/>
+          </a:p>
+        </p:txBody>
+      </p:sp>
+      <p:sp>
+        <p:nvSpPr>
+          <p:cNvPr id="6" name="Shape 3"/>
+          <p:cNvSpPr/>
+          <p:nvPr/>
+        </p:nvSpPr>
+        <p:spPr>
+          <a:xfrm>
+            <a:off x="914400" y="3611880"/>
+            <a:ext cx="8229600" cy="0"/>
+          </a:xfrm>
+          <a:prstGeom prst="line">
+            <a:avLst/>
+          </a:prstGeom>
+          <a:noFill/>
+          <a:ln w="12700">
             <a:solidFill>
-              <a:srgbClr val="FFFFFF"/>
+              <a:srgbClr val="6B4F35"/>
             </a:solidFill>
             <a:prstDash val="solid"/>
           </a:ln>
@@ -4123,14 +3704,34 @@
       </p:sp>
       <p:sp>
         <p:nvSpPr>
-          <p:cNvPr id="12" name="Text 9"/>
-          <p:cNvSpPr/>
-          <p:nvPr/>
-        </p:nvSpPr>
-        <p:spPr>
-          <a:xfrm>
-            <a:off x="3611880" y="3611880"/>
-            <a:ext cx="2468880" cy="320040"/>
+          <p:cNvPr id="7" name="Shape 4"/>
+          <p:cNvSpPr/>
+          <p:nvPr/>
+        </p:nvSpPr>
+        <p:spPr>
+          <a:xfrm>
+            <a:off x="841248" y="3538728"/>
+            <a:ext cx="146304" cy="146304"/>
+          </a:xfrm>
+          <a:prstGeom prst="ellipse">
+            <a:avLst/>
+          </a:prstGeom>
+          <a:solidFill>
+            <a:srgbClr val="F5C5CE"/>
+          </a:solidFill>
+          <a:ln/>
+        </p:spPr>
+      </p:sp>
+      <p:sp>
+        <p:nvSpPr>
+          <p:cNvPr id="8" name="Text 5"/>
+          <p:cNvSpPr/>
+          <p:nvPr/>
+        </p:nvSpPr>
+        <p:spPr>
+          <a:xfrm>
+            <a:off x="822960" y="3840480"/>
+            <a:ext cx="2468880" cy="274320"/>
           </a:xfrm>
           <a:prstGeom prst="rect">
             <a:avLst/>
@@ -4146,54 +3747,54 @@
               <a:buNone/>
             </a:pPr>
             <a:r>
-              <a:rPr lang="en-US" sz="1500" b="1" dirty="0">
+              <a:rPr lang="en-US" sz="1250" spc="100" kern="0" dirty="0">
                 <a:solidFill>
                   <a:srgbClr val="F5C5CE"/>
+                </a:solidFill>
+                <a:latin typeface="Courier New" pitchFamily="34" charset="0"/>
+                <a:ea typeface="Courier New" pitchFamily="34" charset="-122"/>
+                <a:cs typeface="Courier New" pitchFamily="34" charset="-120"/>
+              </a:rPr>
+              <a:t>Now</a:t>
+            </a:r>
+            <a:endParaRPr lang="en-US" sz="1250" dirty="0"/>
+          </a:p>
+        </p:txBody>
+      </p:sp>
+      <p:sp>
+        <p:nvSpPr>
+          <p:cNvPr id="9" name="Text 6"/>
+          <p:cNvSpPr/>
+          <p:nvPr/>
+        </p:nvSpPr>
+        <p:spPr>
+          <a:xfrm>
+            <a:off x="822960" y="4160520"/>
+            <a:ext cx="2468880" cy="365760"/>
+          </a:xfrm>
+          <a:prstGeom prst="rect">
+            <a:avLst/>
+          </a:prstGeom>
+          <a:noFill/>
+          <a:ln/>
+        </p:spPr>
+        <p:txBody>
+          <a:bodyPr wrap="square" lIns="0" tIns="0" rIns="0" bIns="0" rtlCol="0" anchor="ctr"/>
+          <a:lstStyle/>
+          <a:p>
+            <a:pPr indent="0" marL="0">
+              <a:buNone/>
+            </a:pPr>
+            <a:r>
+              <a:rPr lang="en-US" sz="1800" b="1" dirty="0">
+                <a:solidFill>
+                  <a:srgbClr val="FFFFFF"/>
                 </a:solidFill>
                 <a:latin typeface="Gothic A1" pitchFamily="34" charset="0"/>
                 <a:ea typeface="Gothic A1" pitchFamily="34" charset="-122"/>
                 <a:cs typeface="Gothic A1" pitchFamily="34" charset="-120"/>
               </a:rPr>
-              <a:t>Year 1</a:t>
-            </a:r>
-            <a:endParaRPr lang="en-US" sz="1500" dirty="0"/>
-          </a:p>
-        </p:txBody>
-      </p:sp>
-      <p:sp>
-        <p:nvSpPr>
-          <p:cNvPr id="13" name="Text 10"/>
-          <p:cNvSpPr/>
-          <p:nvPr/>
-        </p:nvSpPr>
-        <p:spPr>
-          <a:xfrm>
-            <a:off x="3611880" y="3950208"/>
-            <a:ext cx="2468880" cy="365760"/>
-          </a:xfrm>
-          <a:prstGeom prst="rect">
-            <a:avLst/>
-          </a:prstGeom>
-          <a:noFill/>
-          <a:ln/>
-        </p:spPr>
-        <p:txBody>
-          <a:bodyPr wrap="square" lIns="0" tIns="0" rIns="0" bIns="0" rtlCol="0" anchor="ctr"/>
-          <a:lstStyle/>
-          <a:p>
-            <a:pPr indent="0" marL="0">
-              <a:buNone/>
-            </a:pPr>
-            <a:r>
-              <a:rPr lang="en-US" sz="1800" b="1" dirty="0">
-                <a:solidFill>
-                  <a:srgbClr val="FFFFFF"/>
-                </a:solidFill>
-                <a:latin typeface="Gothic A1" pitchFamily="34" charset="0"/>
-                <a:ea typeface="Gothic A1" pitchFamily="34" charset="-122"/>
-                <a:cs typeface="Gothic A1" pitchFamily="34" charset="-120"/>
-              </a:rPr>
-              <a:t>Vested tokens</a:t>
+              <a:t>Launch</a:t>
             </a:r>
             <a:endParaRPr lang="en-US" sz="1800" dirty="0"/>
           </a:p>
@@ -4201,13 +3802,13 @@
       </p:sp>
       <p:sp>
         <p:nvSpPr>
-          <p:cNvPr id="14" name="Text 11"/>
-          <p:cNvSpPr/>
-          <p:nvPr/>
-        </p:nvSpPr>
-        <p:spPr>
-          <a:xfrm>
-            <a:off x="3611880" y="4343400"/>
+          <p:cNvPr id="10" name="Text 7"/>
+          <p:cNvSpPr/>
+          <p:nvPr/>
+        </p:nvSpPr>
+        <p:spPr>
+          <a:xfrm>
+            <a:off x="822960" y="4572000"/>
             <a:ext cx="2468880" cy="1005840"/>
           </a:xfrm>
           <a:prstGeom prst="rect">
@@ -4229,13 +3830,13 @@
             <a:r>
               <a:rPr lang="en-US" sz="1450" dirty="0">
                 <a:solidFill>
-                  <a:srgbClr val="C8DFF0"/>
+                  <a:srgbClr val="E4D8C8"/>
                 </a:solidFill>
                 <a:latin typeface="Cormorant" pitchFamily="34" charset="0"/>
                 <a:ea typeface="Cormorant" pitchFamily="34" charset="-122"/>
                 <a:cs typeface="Cormorant" pitchFamily="34" charset="-120"/>
               </a:rPr>
-              <a:t>Token vesting through the first year aligns early contributors.</a:t>
+              <a:t>Genesis network live in demo mode — wallets, ledger and leaderboard.</a:t>
             </a:r>
             <a:endParaRPr lang="en-US" sz="1450" dirty="0"/>
           </a:p>
@@ -4243,14 +3844,14 @@
       </p:sp>
       <p:sp>
         <p:nvSpPr>
-          <p:cNvPr id="15" name="Shape 12"/>
-          <p:cNvSpPr/>
-          <p:nvPr/>
-        </p:nvSpPr>
-        <p:spPr>
-          <a:xfrm>
-            <a:off x="6492240" y="3291840"/>
-            <a:ext cx="182880" cy="182880"/>
+          <p:cNvPr id="11" name="Shape 8"/>
+          <p:cNvSpPr/>
+          <p:nvPr/>
+        </p:nvSpPr>
+        <p:spPr>
+          <a:xfrm>
+            <a:off x="3584448" y="3538728"/>
+            <a:ext cx="146304" cy="146304"/>
           </a:xfrm>
           <a:prstGeom prst="ellipse">
             <a:avLst/>
@@ -4258,24 +3859,19 @@
           <a:solidFill>
             <a:srgbClr val="F5C5CE"/>
           </a:solidFill>
-          <a:ln w="19050">
-            <a:solidFill>
-              <a:srgbClr val="FFFFFF"/>
-            </a:solidFill>
-            <a:prstDash val="solid"/>
-          </a:ln>
-        </p:spPr>
-      </p:sp>
-      <p:sp>
-        <p:nvSpPr>
-          <p:cNvPr id="16" name="Text 13"/>
-          <p:cNvSpPr/>
-          <p:nvPr/>
-        </p:nvSpPr>
-        <p:spPr>
-          <a:xfrm>
-            <a:off x="6446520" y="3611880"/>
-            <a:ext cx="2468880" cy="320040"/>
+          <a:ln/>
+        </p:spPr>
+      </p:sp>
+      <p:sp>
+        <p:nvSpPr>
+          <p:cNvPr id="12" name="Text 9"/>
+          <p:cNvSpPr/>
+          <p:nvPr/>
+        </p:nvSpPr>
+        <p:spPr>
+          <a:xfrm>
+            <a:off x="3566160" y="3840480"/>
+            <a:ext cx="2468880" cy="274320"/>
           </a:xfrm>
           <a:prstGeom prst="rect">
             <a:avLst/>
@@ -4291,54 +3887,54 @@
               <a:buNone/>
             </a:pPr>
             <a:r>
-              <a:rPr lang="en-US" sz="1500" b="1" dirty="0">
+              <a:rPr lang="en-US" sz="1250" spc="100" kern="0" dirty="0">
                 <a:solidFill>
                   <a:srgbClr val="F5C5CE"/>
+                </a:solidFill>
+                <a:latin typeface="Courier New" pitchFamily="34" charset="0"/>
+                <a:ea typeface="Courier New" pitchFamily="34" charset="-122"/>
+                <a:cs typeface="Courier New" pitchFamily="34" charset="-120"/>
+              </a:rPr>
+              <a:t>Year 1</a:t>
+            </a:r>
+            <a:endParaRPr lang="en-US" sz="1250" dirty="0"/>
+          </a:p>
+        </p:txBody>
+      </p:sp>
+      <p:sp>
+        <p:nvSpPr>
+          <p:cNvPr id="13" name="Text 10"/>
+          <p:cNvSpPr/>
+          <p:nvPr/>
+        </p:nvSpPr>
+        <p:spPr>
+          <a:xfrm>
+            <a:off x="3566160" y="4160520"/>
+            <a:ext cx="2468880" cy="365760"/>
+          </a:xfrm>
+          <a:prstGeom prst="rect">
+            <a:avLst/>
+          </a:prstGeom>
+          <a:noFill/>
+          <a:ln/>
+        </p:spPr>
+        <p:txBody>
+          <a:bodyPr wrap="square" lIns="0" tIns="0" rIns="0" bIns="0" rtlCol="0" anchor="ctr"/>
+          <a:lstStyle/>
+          <a:p>
+            <a:pPr indent="0" marL="0">
+              <a:buNone/>
+            </a:pPr>
+            <a:r>
+              <a:rPr lang="en-US" sz="1800" b="1" dirty="0">
+                <a:solidFill>
+                  <a:srgbClr val="FFFFFF"/>
                 </a:solidFill>
                 <a:latin typeface="Gothic A1" pitchFamily="34" charset="0"/>
                 <a:ea typeface="Gothic A1" pitchFamily="34" charset="-122"/>
                 <a:cs typeface="Gothic A1" pitchFamily="34" charset="-120"/>
               </a:rPr>
-              <a:t>Ongoing</a:t>
-            </a:r>
-            <a:endParaRPr lang="en-US" sz="1500" dirty="0"/>
-          </a:p>
-        </p:txBody>
-      </p:sp>
-      <p:sp>
-        <p:nvSpPr>
-          <p:cNvPr id="17" name="Text 14"/>
-          <p:cNvSpPr/>
-          <p:nvPr/>
-        </p:nvSpPr>
-        <p:spPr>
-          <a:xfrm>
-            <a:off x="6446520" y="3950208"/>
-            <a:ext cx="2468880" cy="365760"/>
-          </a:xfrm>
-          <a:prstGeom prst="rect">
-            <a:avLst/>
-          </a:prstGeom>
-          <a:noFill/>
-          <a:ln/>
-        </p:spPr>
-        <p:txBody>
-          <a:bodyPr wrap="square" lIns="0" tIns="0" rIns="0" bIns="0" rtlCol="0" anchor="ctr"/>
-          <a:lstStyle/>
-          <a:p>
-            <a:pPr indent="0" marL="0">
-              <a:buNone/>
-            </a:pPr>
-            <a:r>
-              <a:rPr lang="en-US" sz="1800" b="1" dirty="0">
-                <a:solidFill>
-                  <a:srgbClr val="FFFFFF"/>
-                </a:solidFill>
-                <a:latin typeface="Gothic A1" pitchFamily="34" charset="0"/>
-                <a:ea typeface="Gothic A1" pitchFamily="34" charset="-122"/>
-                <a:cs typeface="Gothic A1" pitchFamily="34" charset="-120"/>
-              </a:rPr>
-              <a:t>Bounties</a:t>
+              <a:t>Vested tokens</a:t>
             </a:r>
             <a:endParaRPr lang="en-US" sz="1800" dirty="0"/>
           </a:p>
@@ -4346,13 +3942,13 @@
       </p:sp>
       <p:sp>
         <p:nvSpPr>
-          <p:cNvPr id="18" name="Text 15"/>
-          <p:cNvSpPr/>
-          <p:nvPr/>
-        </p:nvSpPr>
-        <p:spPr>
-          <a:xfrm>
-            <a:off x="6446520" y="4343400"/>
+          <p:cNvPr id="14" name="Text 11"/>
+          <p:cNvSpPr/>
+          <p:nvPr/>
+        </p:nvSpPr>
+        <p:spPr>
+          <a:xfrm>
+            <a:off x="3566160" y="4572000"/>
             <a:ext cx="2468880" cy="1005840"/>
           </a:xfrm>
           <a:prstGeom prst="rect">
@@ -4374,13 +3970,13 @@
             <a:r>
               <a:rPr lang="en-US" sz="1450" dirty="0">
                 <a:solidFill>
-                  <a:srgbClr val="C8DFF0"/>
+                  <a:srgbClr val="E4D8C8"/>
                 </a:solidFill>
                 <a:latin typeface="Cormorant" pitchFamily="34" charset="0"/>
                 <a:ea typeface="Cormorant" pitchFamily="34" charset="-122"/>
                 <a:cs typeface="Cormorant" pitchFamily="34" charset="-120"/>
               </a:rPr>
-              <a:t>Sponsors steer compute toward targeted breakthroughs.</a:t>
+              <a:t>Token vesting through the first year aligns early contributors.</a:t>
             </a:r>
             <a:endParaRPr lang="en-US" sz="1450" dirty="0"/>
           </a:p>
@@ -4388,14 +3984,14 @@
       </p:sp>
       <p:sp>
         <p:nvSpPr>
-          <p:cNvPr id="19" name="Shape 16"/>
-          <p:cNvSpPr/>
-          <p:nvPr/>
-        </p:nvSpPr>
-        <p:spPr>
-          <a:xfrm>
-            <a:off x="9326880" y="3291840"/>
-            <a:ext cx="182880" cy="182880"/>
+          <p:cNvPr id="15" name="Shape 12"/>
+          <p:cNvSpPr/>
+          <p:nvPr/>
+        </p:nvSpPr>
+        <p:spPr>
+          <a:xfrm>
+            <a:off x="6327648" y="3538728"/>
+            <a:ext cx="146304" cy="146304"/>
           </a:xfrm>
           <a:prstGeom prst="ellipse">
             <a:avLst/>
@@ -4403,24 +3999,19 @@
           <a:solidFill>
             <a:srgbClr val="F5C5CE"/>
           </a:solidFill>
-          <a:ln w="19050">
-            <a:solidFill>
-              <a:srgbClr val="FFFFFF"/>
-            </a:solidFill>
-            <a:prstDash val="solid"/>
-          </a:ln>
-        </p:spPr>
-      </p:sp>
-      <p:sp>
-        <p:nvSpPr>
-          <p:cNvPr id="20" name="Text 17"/>
-          <p:cNvSpPr/>
-          <p:nvPr/>
-        </p:nvSpPr>
-        <p:spPr>
-          <a:xfrm>
-            <a:off x="9281160" y="3611880"/>
-            <a:ext cx="2468880" cy="320040"/>
+          <a:ln/>
+        </p:spPr>
+      </p:sp>
+      <p:sp>
+        <p:nvSpPr>
+          <p:cNvPr id="16" name="Text 13"/>
+          <p:cNvSpPr/>
+          <p:nvPr/>
+        </p:nvSpPr>
+        <p:spPr>
+          <a:xfrm>
+            <a:off x="6309360" y="3840480"/>
+            <a:ext cx="2468880" cy="274320"/>
           </a:xfrm>
           <a:prstGeom prst="rect">
             <a:avLst/>
@@ -4436,54 +4027,54 @@
               <a:buNone/>
             </a:pPr>
             <a:r>
-              <a:rPr lang="en-US" sz="1500" b="1" dirty="0">
+              <a:rPr lang="en-US" sz="1250" spc="100" kern="0" dirty="0">
                 <a:solidFill>
                   <a:srgbClr val="F5C5CE"/>
+                </a:solidFill>
+                <a:latin typeface="Courier New" pitchFamily="34" charset="0"/>
+                <a:ea typeface="Courier New" pitchFamily="34" charset="-122"/>
+                <a:cs typeface="Courier New" pitchFamily="34" charset="-120"/>
+              </a:rPr>
+              <a:t>Ongoing</a:t>
+            </a:r>
+            <a:endParaRPr lang="en-US" sz="1250" dirty="0"/>
+          </a:p>
+        </p:txBody>
+      </p:sp>
+      <p:sp>
+        <p:nvSpPr>
+          <p:cNvPr id="17" name="Text 14"/>
+          <p:cNvSpPr/>
+          <p:nvPr/>
+        </p:nvSpPr>
+        <p:spPr>
+          <a:xfrm>
+            <a:off x="6309360" y="4160520"/>
+            <a:ext cx="2468880" cy="365760"/>
+          </a:xfrm>
+          <a:prstGeom prst="rect">
+            <a:avLst/>
+          </a:prstGeom>
+          <a:noFill/>
+          <a:ln/>
+        </p:spPr>
+        <p:txBody>
+          <a:bodyPr wrap="square" lIns="0" tIns="0" rIns="0" bIns="0" rtlCol="0" anchor="ctr"/>
+          <a:lstStyle/>
+          <a:p>
+            <a:pPr indent="0" marL="0">
+              <a:buNone/>
+            </a:pPr>
+            <a:r>
+              <a:rPr lang="en-US" sz="1800" b="1" dirty="0">
+                <a:solidFill>
+                  <a:srgbClr val="FFFFFF"/>
                 </a:solidFill>
                 <a:latin typeface="Gothic A1" pitchFamily="34" charset="0"/>
                 <a:ea typeface="Gothic A1" pitchFamily="34" charset="-122"/>
                 <a:cs typeface="Gothic A1" pitchFamily="34" charset="-120"/>
               </a:rPr>
-              <a:t>Q4 '26</a:t>
-            </a:r>
-            <a:endParaRPr lang="en-US" sz="1500" dirty="0"/>
-          </a:p>
-        </p:txBody>
-      </p:sp>
-      <p:sp>
-        <p:nvSpPr>
-          <p:cNvPr id="21" name="Text 18"/>
-          <p:cNvSpPr/>
-          <p:nvPr/>
-        </p:nvSpPr>
-        <p:spPr>
-          <a:xfrm>
-            <a:off x="9281160" y="3950208"/>
-            <a:ext cx="2468880" cy="365760"/>
-          </a:xfrm>
-          <a:prstGeom prst="rect">
-            <a:avLst/>
-          </a:prstGeom>
-          <a:noFill/>
-          <a:ln/>
-        </p:spPr>
-        <p:txBody>
-          <a:bodyPr wrap="square" lIns="0" tIns="0" rIns="0" bIns="0" rtlCol="0" anchor="ctr"/>
-          <a:lstStyle/>
-          <a:p>
-            <a:pPr indent="0" marL="0">
-              <a:buNone/>
-            </a:pPr>
-            <a:r>
-              <a:rPr lang="en-US" sz="1800" b="1" dirty="0">
-                <a:solidFill>
-                  <a:srgbClr val="FFFFFF"/>
-                </a:solidFill>
-                <a:latin typeface="Gothic A1" pitchFamily="34" charset="0"/>
-                <a:ea typeface="Gothic A1" pitchFamily="34" charset="-122"/>
-                <a:cs typeface="Gothic A1" pitchFamily="34" charset="-120"/>
-              </a:rPr>
-              <a:t>SDK goes live</a:t>
+              <a:t>Bounties</a:t>
             </a:r>
             <a:endParaRPr lang="en-US" sz="1800" dirty="0"/>
           </a:p>
@@ -4491,13 +4082,13 @@
       </p:sp>
       <p:sp>
         <p:nvSpPr>
-          <p:cNvPr id="22" name="Text 19"/>
-          <p:cNvSpPr/>
-          <p:nvPr/>
-        </p:nvSpPr>
-        <p:spPr>
-          <a:xfrm>
-            <a:off x="9281160" y="4343400"/>
+          <p:cNvPr id="18" name="Text 15"/>
+          <p:cNvSpPr/>
+          <p:nvPr/>
+        </p:nvSpPr>
+        <p:spPr>
+          <a:xfrm>
+            <a:off x="6309360" y="4572000"/>
             <a:ext cx="2468880" cy="1005840"/>
           </a:xfrm>
           <a:prstGeom prst="rect">
@@ -4519,13 +4110,13 @@
             <a:r>
               <a:rPr lang="en-US" sz="1450" dirty="0">
                 <a:solidFill>
-                  <a:srgbClr val="C8DFF0"/>
+                  <a:srgbClr val="E4D8C8"/>
                 </a:solidFill>
                 <a:latin typeface="Cormorant" pitchFamily="34" charset="0"/>
                 <a:ea typeface="Cormorant" pitchFamily="34" charset="-122"/>
                 <a:cs typeface="Cormorant" pitchFamily="34" charset="-120"/>
               </a:rPr>
-              <a:t>Developers plug games &amp; apps into the network — scale unlocks.</a:t>
+              <a:t>Sponsors steer compute toward targeted breakthroughs.</a:t>
             </a:r>
             <a:endParaRPr lang="en-US" sz="1450" dirty="0"/>
           </a:p>
@@ -4533,14 +4124,34 @@
       </p:sp>
       <p:sp>
         <p:nvSpPr>
-          <p:cNvPr id="23" name="Text 20"/>
-          <p:cNvSpPr/>
-          <p:nvPr/>
-        </p:nvSpPr>
-        <p:spPr>
-          <a:xfrm>
-            <a:off x="713232" y="6080760"/>
-            <a:ext cx="10058400" cy="457200"/>
+          <p:cNvPr id="19" name="Shape 16"/>
+          <p:cNvSpPr/>
+          <p:nvPr/>
+        </p:nvSpPr>
+        <p:spPr>
+          <a:xfrm>
+            <a:off x="9070848" y="3538728"/>
+            <a:ext cx="146304" cy="146304"/>
+          </a:xfrm>
+          <a:prstGeom prst="ellipse">
+            <a:avLst/>
+          </a:prstGeom>
+          <a:solidFill>
+            <a:srgbClr val="F5C5CE"/>
+          </a:solidFill>
+          <a:ln/>
+        </p:spPr>
+      </p:sp>
+      <p:sp>
+        <p:nvSpPr>
+          <p:cNvPr id="20" name="Text 17"/>
+          <p:cNvSpPr/>
+          <p:nvPr/>
+        </p:nvSpPr>
+        <p:spPr>
+          <a:xfrm>
+            <a:off x="9052560" y="3840480"/>
+            <a:ext cx="2468880" cy="274320"/>
           </a:xfrm>
           <a:prstGeom prst="rect">
             <a:avLst/>
@@ -4556,17 +4167,221 @@
               <a:buNone/>
             </a:pPr>
             <a:r>
-              <a:rPr lang="en-US" sz="1800" i="1" dirty="0">
+              <a:rPr lang="en-US" sz="1250" spc="100" kern="0" dirty="0">
+                <a:solidFill>
+                  <a:srgbClr val="F5C5CE"/>
+                </a:solidFill>
+                <a:latin typeface="Courier New" pitchFamily="34" charset="0"/>
+                <a:ea typeface="Courier New" pitchFamily="34" charset="-122"/>
+                <a:cs typeface="Courier New" pitchFamily="34" charset="-120"/>
+              </a:rPr>
+              <a:t>Q4 '26</a:t>
+            </a:r>
+            <a:endParaRPr lang="en-US" sz="1250" dirty="0"/>
+          </a:p>
+        </p:txBody>
+      </p:sp>
+      <p:sp>
+        <p:nvSpPr>
+          <p:cNvPr id="21" name="Text 18"/>
+          <p:cNvSpPr/>
+          <p:nvPr/>
+        </p:nvSpPr>
+        <p:spPr>
+          <a:xfrm>
+            <a:off x="9052560" y="4160520"/>
+            <a:ext cx="2468880" cy="365760"/>
+          </a:xfrm>
+          <a:prstGeom prst="rect">
+            <a:avLst/>
+          </a:prstGeom>
+          <a:noFill/>
+          <a:ln/>
+        </p:spPr>
+        <p:txBody>
+          <a:bodyPr wrap="square" lIns="0" tIns="0" rIns="0" bIns="0" rtlCol="0" anchor="ctr"/>
+          <a:lstStyle/>
+          <a:p>
+            <a:pPr indent="0" marL="0">
+              <a:buNone/>
+            </a:pPr>
+            <a:r>
+              <a:rPr lang="en-US" sz="1800" b="1" dirty="0">
                 <a:solidFill>
                   <a:srgbClr val="FFFFFF"/>
+                </a:solidFill>
+                <a:latin typeface="Gothic A1" pitchFamily="34" charset="0"/>
+                <a:ea typeface="Gothic A1" pitchFamily="34" charset="-122"/>
+                <a:cs typeface="Gothic A1" pitchFamily="34" charset="-120"/>
+              </a:rPr>
+              <a:t>SDK goes live</a:t>
+            </a:r>
+            <a:endParaRPr lang="en-US" sz="1800" dirty="0"/>
+          </a:p>
+        </p:txBody>
+      </p:sp>
+      <p:sp>
+        <p:nvSpPr>
+          <p:cNvPr id="22" name="Text 19"/>
+          <p:cNvSpPr/>
+          <p:nvPr/>
+        </p:nvSpPr>
+        <p:spPr>
+          <a:xfrm>
+            <a:off x="9052560" y="4572000"/>
+            <a:ext cx="2468880" cy="1005840"/>
+          </a:xfrm>
+          <a:prstGeom prst="rect">
+            <a:avLst/>
+          </a:prstGeom>
+          <a:noFill/>
+          <a:ln/>
+        </p:spPr>
+        <p:txBody>
+          <a:bodyPr wrap="square" lIns="0" tIns="0" rIns="0" bIns="0" rtlCol="0" anchor="ctr"/>
+          <a:lstStyle/>
+          <a:p>
+            <a:pPr indent="0" marL="0">
+              <a:lnSpc>
+                <a:spcPts val="1700"/>
+              </a:lnSpc>
+              <a:buNone/>
+            </a:pPr>
+            <a:r>
+              <a:rPr lang="en-US" sz="1450" dirty="0">
+                <a:solidFill>
+                  <a:srgbClr val="E4D8C8"/>
                 </a:solidFill>
                 <a:latin typeface="Cormorant" pitchFamily="34" charset="0"/>
                 <a:ea typeface="Cormorant" pitchFamily="34" charset="-122"/>
                 <a:cs typeface="Cormorant" pitchFamily="34" charset="-120"/>
               </a:rPr>
+              <a:t>Developers plug games &amp; apps into the network — scale unlocks.</a:t>
+            </a:r>
+            <a:endParaRPr lang="en-US" sz="1450" dirty="0"/>
+          </a:p>
+        </p:txBody>
+      </p:sp>
+      <p:sp>
+        <p:nvSpPr>
+          <p:cNvPr id="23" name="Shape 20"/>
+          <p:cNvSpPr/>
+          <p:nvPr/>
+        </p:nvSpPr>
+        <p:spPr>
+          <a:xfrm>
+            <a:off x="822960" y="5943600"/>
+            <a:ext cx="10545775" cy="0"/>
+          </a:xfrm>
+          <a:prstGeom prst="line">
+            <a:avLst/>
+          </a:prstGeom>
+          <a:noFill/>
+          <a:ln w="12700">
+            <a:solidFill>
+              <a:srgbClr val="6B4F35"/>
+            </a:solidFill>
+            <a:prstDash val="solid"/>
+          </a:ln>
+        </p:spPr>
+      </p:sp>
+      <p:sp>
+        <p:nvSpPr>
+          <p:cNvPr id="24" name="Text 21"/>
+          <p:cNvSpPr/>
+          <p:nvPr/>
+        </p:nvSpPr>
+        <p:spPr>
+          <a:xfrm>
+            <a:off x="822960" y="6126480"/>
+            <a:ext cx="7772400" cy="457200"/>
+          </a:xfrm>
+          <a:prstGeom prst="rect">
+            <a:avLst/>
+          </a:prstGeom>
+          <a:noFill/>
+          <a:ln/>
+        </p:spPr>
+        <p:txBody>
+          <a:bodyPr wrap="square" lIns="0" tIns="0" rIns="0" bIns="0" rtlCol="0" anchor="ctr"/>
+          <a:lstStyle/>
+          <a:p>
+            <a:pPr indent="0" marL="0">
+              <a:buNone/>
+            </a:pPr>
+            <a:r>
+              <a:rPr lang="en-US" sz="1800" i="1" dirty="0">
+                <a:solidFill>
+                  <a:srgbClr val="FFFFFF"/>
+                </a:solidFill>
+                <a:latin typeface="Cormorant" pitchFamily="34" charset="0"/>
+                <a:ea typeface="Cormorant" pitchFamily="34" charset="-122"/>
+                <a:cs typeface="Cormorant" pitchFamily="34" charset="-120"/>
+              </a:rPr>
               <a:t>Support the search with your idle compute. Help find the next AI models.</a:t>
             </a:r>
             <a:endParaRPr lang="en-US" sz="1800" dirty="0"/>
+          </a:p>
+        </p:txBody>
+      </p:sp>
+      <p:sp>
+        <p:nvSpPr>
+          <p:cNvPr id="25" name="Shape 22"/>
+          <p:cNvSpPr/>
+          <p:nvPr/>
+        </p:nvSpPr>
+        <p:spPr>
+          <a:xfrm>
+            <a:off x="9738360" y="6089904"/>
+            <a:ext cx="1627632" cy="420624"/>
+          </a:xfrm>
+          <a:prstGeom prst="roundRect">
+            <a:avLst>
+              <a:gd name="adj" fmla="val 50000"/>
+            </a:avLst>
+          </a:prstGeom>
+          <a:solidFill>
+            <a:srgbClr val="F5C5CE"/>
+          </a:solidFill>
+          <a:ln/>
+        </p:spPr>
+      </p:sp>
+      <p:sp>
+        <p:nvSpPr>
+          <p:cNvPr id="26" name="Text 23"/>
+          <p:cNvSpPr/>
+          <p:nvPr/>
+        </p:nvSpPr>
+        <p:spPr>
+          <a:xfrm>
+            <a:off x="9738360" y="6089904"/>
+            <a:ext cx="1627632" cy="420624"/>
+          </a:xfrm>
+          <a:prstGeom prst="rect">
+            <a:avLst/>
+          </a:prstGeom>
+          <a:noFill/>
+          <a:ln/>
+        </p:spPr>
+        <p:txBody>
+          <a:bodyPr wrap="square" lIns="0" tIns="0" rIns="0" bIns="0" rtlCol="0" anchor="ctr"/>
+          <a:lstStyle/>
+          <a:p>
+            <a:pPr algn="ctr" indent="0" marL="0">
+              <a:buNone/>
+            </a:pPr>
+            <a:r>
+              <a:rPr lang="en-US" sz="1250" b="1" dirty="0">
+                <a:solidFill>
+                  <a:srgbClr val="2E2118"/>
+                </a:solidFill>
+                <a:latin typeface="Gothic A1" pitchFamily="34" charset="0"/>
+                <a:ea typeface="Gothic A1" pitchFamily="34" charset="-122"/>
+                <a:cs typeface="Gothic A1" pitchFamily="34" charset="-120"/>
+              </a:rPr>
+              <a:t>Join the network</a:t>
+            </a:r>
+            <a:endParaRPr lang="en-US" sz="1250" dirty="0"/>
           </a:p>
         </p:txBody>
       </p:sp>
